--- a/public/fun/pack/pptx/review/보장점검양식_23_가족점검_여름낮잠.pptx
+++ b/public/fun/pack/pptx/review/보장점검양식_23_가족점검_여름낮잠.pptx
@@ -3347,7 +3347,7 @@
             <a:r>
               <a:rPr sz="3600" b="1" i="0">
                 <a:solidFill>
-                  <a:srgbClr val="314F22"/>
+                  <a:srgbClr val="115F41"/>
                 </a:solidFill>
               </a:rPr>
               <a:t>우리 보험 점검 시간</a:t>
@@ -3385,7 +3385,7 @@
             <a:r>
               <a:rPr sz="1700" b="0" i="1">
                 <a:solidFill>
-                  <a:srgbClr val="314F22"/>
+                  <a:srgbClr val="115F41"/>
                 </a:solidFill>
               </a:rPr>
               <a:t>방학 동안 가족 회의로 정리합니다</a:t>
@@ -3460,7 +3460,7 @@
     <p:bg>
       <p:bgPr>
         <a:solidFill>
-          <a:srgbClr val="F3F9F1"/>
+          <a:srgbClr val="EEFCF6"/>
         </a:solidFill>
         <a:effectLst/>
       </p:bgPr>
@@ -3487,7 +3487,7 @@
             <a:avLst/>
           </a:prstGeom>
           <a:solidFill>
-            <a:srgbClr val="5D9640"/>
+            <a:srgbClr val="26C588"/>
           </a:solidFill>
           <a:ln>
             <a:noFill/>
@@ -3516,7 +3516,7 @@
             <a:avLst/>
           </a:prstGeom>
           <a:solidFill>
-            <a:srgbClr val="4B3D8F"/>
+            <a:srgbClr val="209DB6"/>
           </a:solidFill>
           <a:ln>
             <a:noFill/>
@@ -3560,7 +3560,7 @@
             <a:r>
               <a:rPr sz="3000" b="1" i="0">
                 <a:solidFill>
-                  <a:srgbClr val="314F22"/>
+                  <a:srgbClr val="115F41"/>
                 </a:solidFill>
               </a:rPr>
               <a:t>점검 대상 현황</a:t>
@@ -3612,30 +3612,30 @@
                   <a:tcPr anchor="ctr" marL="73152" marR="73152">
                     <a:lnL w="9525" cap="flat" cmpd="sng" algn="ctr">
                       <a:solidFill>
-                        <a:srgbClr val="5D9640"/>
+                        <a:srgbClr val="26C588"/>
                       </a:solidFill>
                       <a:prstDash val="solid"/>
                     </a:lnL>
                     <a:lnR w="9525" cap="flat" cmpd="sng" algn="ctr">
                       <a:solidFill>
-                        <a:srgbClr val="5D9640"/>
+                        <a:srgbClr val="26C588"/>
                       </a:solidFill>
                       <a:prstDash val="solid"/>
                     </a:lnR>
                     <a:lnT w="9525" cap="flat" cmpd="sng" algn="ctr">
                       <a:solidFill>
-                        <a:srgbClr val="5D9640"/>
+                        <a:srgbClr val="26C588"/>
                       </a:solidFill>
                       <a:prstDash val="solid"/>
                     </a:lnT>
                     <a:lnB w="9525" cap="flat" cmpd="sng" algn="ctr">
                       <a:solidFill>
-                        <a:srgbClr val="5D9640"/>
+                        <a:srgbClr val="26C588"/>
                       </a:solidFill>
                       <a:prstDash val="solid"/>
                     </a:lnB>
                     <a:solidFill>
-                      <a:srgbClr val="5D9640"/>
+                      <a:srgbClr val="26C588"/>
                     </a:solidFill>
                   </a:tcPr>
                 </a:tc>
@@ -3658,30 +3658,30 @@
                   <a:tcPr anchor="ctr" marL="73152" marR="73152">
                     <a:lnL w="9525" cap="flat" cmpd="sng" algn="ctr">
                       <a:solidFill>
-                        <a:srgbClr val="5D9640"/>
+                        <a:srgbClr val="26C588"/>
                       </a:solidFill>
                       <a:prstDash val="solid"/>
                     </a:lnL>
                     <a:lnR w="9525" cap="flat" cmpd="sng" algn="ctr">
                       <a:solidFill>
-                        <a:srgbClr val="5D9640"/>
+                        <a:srgbClr val="26C588"/>
                       </a:solidFill>
                       <a:prstDash val="solid"/>
                     </a:lnR>
                     <a:lnT w="9525" cap="flat" cmpd="sng" algn="ctr">
                       <a:solidFill>
-                        <a:srgbClr val="5D9640"/>
+                        <a:srgbClr val="26C588"/>
                       </a:solidFill>
                       <a:prstDash val="solid"/>
                     </a:lnT>
                     <a:lnB w="9525" cap="flat" cmpd="sng" algn="ctr">
                       <a:solidFill>
-                        <a:srgbClr val="5D9640"/>
+                        <a:srgbClr val="26C588"/>
                       </a:solidFill>
                       <a:prstDash val="solid"/>
                     </a:lnB>
                     <a:solidFill>
-                      <a:srgbClr val="5D9640"/>
+                      <a:srgbClr val="26C588"/>
                     </a:solidFill>
                   </a:tcPr>
                 </a:tc>
@@ -3704,30 +3704,30 @@
                   <a:tcPr anchor="ctr" marL="73152" marR="73152">
                     <a:lnL w="9525" cap="flat" cmpd="sng" algn="ctr">
                       <a:solidFill>
-                        <a:srgbClr val="5D9640"/>
+                        <a:srgbClr val="26C588"/>
                       </a:solidFill>
                       <a:prstDash val="solid"/>
                     </a:lnL>
                     <a:lnR w="9525" cap="flat" cmpd="sng" algn="ctr">
                       <a:solidFill>
-                        <a:srgbClr val="5D9640"/>
+                        <a:srgbClr val="26C588"/>
                       </a:solidFill>
                       <a:prstDash val="solid"/>
                     </a:lnR>
                     <a:lnT w="9525" cap="flat" cmpd="sng" algn="ctr">
                       <a:solidFill>
-                        <a:srgbClr val="5D9640"/>
+                        <a:srgbClr val="26C588"/>
                       </a:solidFill>
                       <a:prstDash val="solid"/>
                     </a:lnT>
                     <a:lnB w="9525" cap="flat" cmpd="sng" algn="ctr">
                       <a:solidFill>
-                        <a:srgbClr val="5D9640"/>
+                        <a:srgbClr val="26C588"/>
                       </a:solidFill>
                       <a:prstDash val="solid"/>
                     </a:lnB>
                     <a:solidFill>
-                      <a:srgbClr val="5D9640"/>
+                      <a:srgbClr val="26C588"/>
                     </a:solidFill>
                   </a:tcPr>
                 </a:tc>
@@ -3750,30 +3750,30 @@
                   <a:tcPr anchor="ctr" marL="73152" marR="73152">
                     <a:lnL w="9525" cap="flat" cmpd="sng" algn="ctr">
                       <a:solidFill>
-                        <a:srgbClr val="5D9640"/>
+                        <a:srgbClr val="26C588"/>
                       </a:solidFill>
                       <a:prstDash val="solid"/>
                     </a:lnL>
                     <a:lnR w="9525" cap="flat" cmpd="sng" algn="ctr">
                       <a:solidFill>
-                        <a:srgbClr val="5D9640"/>
+                        <a:srgbClr val="26C588"/>
                       </a:solidFill>
                       <a:prstDash val="solid"/>
                     </a:lnR>
                     <a:lnT w="9525" cap="flat" cmpd="sng" algn="ctr">
                       <a:solidFill>
-                        <a:srgbClr val="5D9640"/>
+                        <a:srgbClr val="26C588"/>
                       </a:solidFill>
                       <a:prstDash val="solid"/>
                     </a:lnT>
                     <a:lnB w="9525" cap="flat" cmpd="sng" algn="ctr">
                       <a:solidFill>
-                        <a:srgbClr val="5D9640"/>
+                        <a:srgbClr val="26C588"/>
                       </a:solidFill>
                       <a:prstDash val="solid"/>
                     </a:lnB>
                     <a:solidFill>
-                      <a:srgbClr val="5D9640"/>
+                      <a:srgbClr val="26C588"/>
                     </a:solidFill>
                   </a:tcPr>
                 </a:tc>
@@ -3788,7 +3788,7 @@
                       <a:r>
                         <a:rPr sz="1600" b="1">
                           <a:solidFill>
-                            <a:srgbClr val="314F22"/>
+                            <a:srgbClr val="115F41"/>
                           </a:solidFill>
                         </a:rPr>
                         <a:t>이름</a:t>
@@ -3798,30 +3798,30 @@
                   <a:tcPr anchor="ctr" marL="73152" marR="73152">
                     <a:lnL w="9525" cap="flat" cmpd="sng" algn="ctr">
                       <a:solidFill>
-                        <a:srgbClr val="DCEED3"/>
+                        <a:srgbClr val="D1FAEA"/>
                       </a:solidFill>
                       <a:prstDash val="solid"/>
                     </a:lnL>
                     <a:lnR w="9525" cap="flat" cmpd="sng" algn="ctr">
                       <a:solidFill>
-                        <a:srgbClr val="DCEED3"/>
+                        <a:srgbClr val="D1FAEA"/>
                       </a:solidFill>
                       <a:prstDash val="solid"/>
                     </a:lnR>
                     <a:lnT w="9525" cap="flat" cmpd="sng" algn="ctr">
                       <a:solidFill>
-                        <a:srgbClr val="DCEED3"/>
+                        <a:srgbClr val="D1FAEA"/>
                       </a:solidFill>
                       <a:prstDash val="solid"/>
                     </a:lnT>
                     <a:lnB w="9525" cap="flat" cmpd="sng" algn="ctr">
                       <a:solidFill>
-                        <a:srgbClr val="DCEED3"/>
+                        <a:srgbClr val="D1FAEA"/>
                       </a:solidFill>
                       <a:prstDash val="solid"/>
                     </a:lnB>
                     <a:solidFill>
-                      <a:srgbClr val="DCEED3"/>
+                      <a:srgbClr val="D1FAEA"/>
                     </a:solidFill>
                   </a:tcPr>
                 </a:tc>
@@ -3844,25 +3844,25 @@
                   <a:tcPr anchor="ctr" marL="73152" marR="73152">
                     <a:lnL w="9525" cap="flat" cmpd="sng" algn="ctr">
                       <a:solidFill>
-                        <a:srgbClr val="DCEED3"/>
+                        <a:srgbClr val="D1FAEA"/>
                       </a:solidFill>
                       <a:prstDash val="solid"/>
                     </a:lnL>
                     <a:lnR w="9525" cap="flat" cmpd="sng" algn="ctr">
                       <a:solidFill>
-                        <a:srgbClr val="DCEED3"/>
+                        <a:srgbClr val="D1FAEA"/>
                       </a:solidFill>
                       <a:prstDash val="solid"/>
                     </a:lnR>
                     <a:lnT w="9525" cap="flat" cmpd="sng" algn="ctr">
                       <a:solidFill>
-                        <a:srgbClr val="DCEED3"/>
+                        <a:srgbClr val="D1FAEA"/>
                       </a:solidFill>
                       <a:prstDash val="solid"/>
                     </a:lnT>
                     <a:lnB w="9525" cap="flat" cmpd="sng" algn="ctr">
                       <a:solidFill>
-                        <a:srgbClr val="DCEED3"/>
+                        <a:srgbClr val="D1FAEA"/>
                       </a:solidFill>
                       <a:prstDash val="solid"/>
                     </a:lnB>
@@ -3890,25 +3890,25 @@
                   <a:tcPr anchor="ctr" marL="73152" marR="73152">
                     <a:lnL w="9525" cap="flat" cmpd="sng" algn="ctr">
                       <a:solidFill>
-                        <a:srgbClr val="DCEED3"/>
+                        <a:srgbClr val="D1FAEA"/>
                       </a:solidFill>
                       <a:prstDash val="solid"/>
                     </a:lnL>
                     <a:lnR w="9525" cap="flat" cmpd="sng" algn="ctr">
                       <a:solidFill>
-                        <a:srgbClr val="DCEED3"/>
+                        <a:srgbClr val="D1FAEA"/>
                       </a:solidFill>
                       <a:prstDash val="solid"/>
                     </a:lnR>
                     <a:lnT w="9525" cap="flat" cmpd="sng" algn="ctr">
                       <a:solidFill>
-                        <a:srgbClr val="DCEED3"/>
+                        <a:srgbClr val="D1FAEA"/>
                       </a:solidFill>
                       <a:prstDash val="solid"/>
                     </a:lnT>
                     <a:lnB w="9525" cap="flat" cmpd="sng" algn="ctr">
                       <a:solidFill>
-                        <a:srgbClr val="DCEED3"/>
+                        <a:srgbClr val="D1FAEA"/>
                       </a:solidFill>
                       <a:prstDash val="solid"/>
                     </a:lnB>
@@ -3936,25 +3936,25 @@
                   <a:tcPr anchor="ctr" marL="73152" marR="73152">
                     <a:lnL w="9525" cap="flat" cmpd="sng" algn="ctr">
                       <a:solidFill>
-                        <a:srgbClr val="DCEED3"/>
+                        <a:srgbClr val="D1FAEA"/>
                       </a:solidFill>
                       <a:prstDash val="solid"/>
                     </a:lnL>
                     <a:lnR w="9525" cap="flat" cmpd="sng" algn="ctr">
                       <a:solidFill>
-                        <a:srgbClr val="DCEED3"/>
+                        <a:srgbClr val="D1FAEA"/>
                       </a:solidFill>
                       <a:prstDash val="solid"/>
                     </a:lnR>
                     <a:lnT w="9525" cap="flat" cmpd="sng" algn="ctr">
                       <a:solidFill>
-                        <a:srgbClr val="DCEED3"/>
+                        <a:srgbClr val="D1FAEA"/>
                       </a:solidFill>
                       <a:prstDash val="solid"/>
                     </a:lnT>
                     <a:lnB w="9525" cap="flat" cmpd="sng" algn="ctr">
                       <a:solidFill>
-                        <a:srgbClr val="DCEED3"/>
+                        <a:srgbClr val="D1FAEA"/>
                       </a:solidFill>
                       <a:prstDash val="solid"/>
                     </a:lnB>
@@ -3974,7 +3974,7 @@
                       <a:r>
                         <a:rPr sz="1600" b="1">
                           <a:solidFill>
-                            <a:srgbClr val="314F22"/>
+                            <a:srgbClr val="115F41"/>
                           </a:solidFill>
                         </a:rPr>
                         <a:t>나이</a:t>
@@ -3984,30 +3984,30 @@
                   <a:tcPr anchor="ctr" marL="73152" marR="73152">
                     <a:lnL w="9525" cap="flat" cmpd="sng" algn="ctr">
                       <a:solidFill>
-                        <a:srgbClr val="DCEED3"/>
+                        <a:srgbClr val="D1FAEA"/>
                       </a:solidFill>
                       <a:prstDash val="solid"/>
                     </a:lnL>
                     <a:lnR w="9525" cap="flat" cmpd="sng" algn="ctr">
                       <a:solidFill>
-                        <a:srgbClr val="DCEED3"/>
+                        <a:srgbClr val="D1FAEA"/>
                       </a:solidFill>
                       <a:prstDash val="solid"/>
                     </a:lnR>
                     <a:lnT w="9525" cap="flat" cmpd="sng" algn="ctr">
                       <a:solidFill>
-                        <a:srgbClr val="DCEED3"/>
+                        <a:srgbClr val="D1FAEA"/>
                       </a:solidFill>
                       <a:prstDash val="solid"/>
                     </a:lnT>
                     <a:lnB w="9525" cap="flat" cmpd="sng" algn="ctr">
                       <a:solidFill>
-                        <a:srgbClr val="DCEED3"/>
+                        <a:srgbClr val="D1FAEA"/>
                       </a:solidFill>
                       <a:prstDash val="solid"/>
                     </a:lnB>
                     <a:solidFill>
-                      <a:srgbClr val="DCEED3"/>
+                      <a:srgbClr val="D1FAEA"/>
                     </a:solidFill>
                   </a:tcPr>
                 </a:tc>
@@ -4030,30 +4030,30 @@
                   <a:tcPr anchor="ctr" marL="73152" marR="73152">
                     <a:lnL w="9525" cap="flat" cmpd="sng" algn="ctr">
                       <a:solidFill>
-                        <a:srgbClr val="DCEED3"/>
+                        <a:srgbClr val="D1FAEA"/>
                       </a:solidFill>
                       <a:prstDash val="solid"/>
                     </a:lnL>
                     <a:lnR w="9525" cap="flat" cmpd="sng" algn="ctr">
                       <a:solidFill>
-                        <a:srgbClr val="DCEED3"/>
+                        <a:srgbClr val="D1FAEA"/>
                       </a:solidFill>
                       <a:prstDash val="solid"/>
                     </a:lnR>
                     <a:lnT w="9525" cap="flat" cmpd="sng" algn="ctr">
                       <a:solidFill>
-                        <a:srgbClr val="DCEED3"/>
+                        <a:srgbClr val="D1FAEA"/>
                       </a:solidFill>
                       <a:prstDash val="solid"/>
                     </a:lnT>
                     <a:lnB w="9525" cap="flat" cmpd="sng" algn="ctr">
                       <a:solidFill>
-                        <a:srgbClr val="DCEED3"/>
+                        <a:srgbClr val="D1FAEA"/>
                       </a:solidFill>
                       <a:prstDash val="solid"/>
                     </a:lnB>
                     <a:solidFill>
-                      <a:srgbClr val="F3F9F1"/>
+                      <a:srgbClr val="EEFCF6"/>
                     </a:solidFill>
                   </a:tcPr>
                 </a:tc>
@@ -4076,30 +4076,30 @@
                   <a:tcPr anchor="ctr" marL="73152" marR="73152">
                     <a:lnL w="9525" cap="flat" cmpd="sng" algn="ctr">
                       <a:solidFill>
-                        <a:srgbClr val="DCEED3"/>
+                        <a:srgbClr val="D1FAEA"/>
                       </a:solidFill>
                       <a:prstDash val="solid"/>
                     </a:lnL>
                     <a:lnR w="9525" cap="flat" cmpd="sng" algn="ctr">
                       <a:solidFill>
-                        <a:srgbClr val="DCEED3"/>
+                        <a:srgbClr val="D1FAEA"/>
                       </a:solidFill>
                       <a:prstDash val="solid"/>
                     </a:lnR>
                     <a:lnT w="9525" cap="flat" cmpd="sng" algn="ctr">
                       <a:solidFill>
-                        <a:srgbClr val="DCEED3"/>
+                        <a:srgbClr val="D1FAEA"/>
                       </a:solidFill>
                       <a:prstDash val="solid"/>
                     </a:lnT>
                     <a:lnB w="9525" cap="flat" cmpd="sng" algn="ctr">
                       <a:solidFill>
-                        <a:srgbClr val="DCEED3"/>
+                        <a:srgbClr val="D1FAEA"/>
                       </a:solidFill>
                       <a:prstDash val="solid"/>
                     </a:lnB>
                     <a:solidFill>
-                      <a:srgbClr val="F3F9F1"/>
+                      <a:srgbClr val="EEFCF6"/>
                     </a:solidFill>
                   </a:tcPr>
                 </a:tc>
@@ -4122,30 +4122,30 @@
                   <a:tcPr anchor="ctr" marL="73152" marR="73152">
                     <a:lnL w="9525" cap="flat" cmpd="sng" algn="ctr">
                       <a:solidFill>
-                        <a:srgbClr val="DCEED3"/>
+                        <a:srgbClr val="D1FAEA"/>
                       </a:solidFill>
                       <a:prstDash val="solid"/>
                     </a:lnL>
                     <a:lnR w="9525" cap="flat" cmpd="sng" algn="ctr">
                       <a:solidFill>
-                        <a:srgbClr val="DCEED3"/>
+                        <a:srgbClr val="D1FAEA"/>
                       </a:solidFill>
                       <a:prstDash val="solid"/>
                     </a:lnR>
                     <a:lnT w="9525" cap="flat" cmpd="sng" algn="ctr">
                       <a:solidFill>
-                        <a:srgbClr val="DCEED3"/>
+                        <a:srgbClr val="D1FAEA"/>
                       </a:solidFill>
                       <a:prstDash val="solid"/>
                     </a:lnT>
                     <a:lnB w="9525" cap="flat" cmpd="sng" algn="ctr">
                       <a:solidFill>
-                        <a:srgbClr val="DCEED3"/>
+                        <a:srgbClr val="D1FAEA"/>
                       </a:solidFill>
                       <a:prstDash val="solid"/>
                     </a:lnB>
                     <a:solidFill>
-                      <a:srgbClr val="F3F9F1"/>
+                      <a:srgbClr val="EEFCF6"/>
                     </a:solidFill>
                   </a:tcPr>
                 </a:tc>
@@ -4160,7 +4160,7 @@
                       <a:r>
                         <a:rPr sz="1600" b="1">
                           <a:solidFill>
-                            <a:srgbClr val="314F22"/>
+                            <a:srgbClr val="115F41"/>
                           </a:solidFill>
                         </a:rPr>
                         <a:t>직업·학교</a:t>
@@ -4170,30 +4170,30 @@
                   <a:tcPr anchor="ctr" marL="73152" marR="73152">
                     <a:lnL w="9525" cap="flat" cmpd="sng" algn="ctr">
                       <a:solidFill>
-                        <a:srgbClr val="DCEED3"/>
+                        <a:srgbClr val="D1FAEA"/>
                       </a:solidFill>
                       <a:prstDash val="solid"/>
                     </a:lnL>
                     <a:lnR w="9525" cap="flat" cmpd="sng" algn="ctr">
                       <a:solidFill>
-                        <a:srgbClr val="DCEED3"/>
+                        <a:srgbClr val="D1FAEA"/>
                       </a:solidFill>
                       <a:prstDash val="solid"/>
                     </a:lnR>
                     <a:lnT w="9525" cap="flat" cmpd="sng" algn="ctr">
                       <a:solidFill>
-                        <a:srgbClr val="DCEED3"/>
+                        <a:srgbClr val="D1FAEA"/>
                       </a:solidFill>
                       <a:prstDash val="solid"/>
                     </a:lnT>
                     <a:lnB w="9525" cap="flat" cmpd="sng" algn="ctr">
                       <a:solidFill>
-                        <a:srgbClr val="DCEED3"/>
+                        <a:srgbClr val="D1FAEA"/>
                       </a:solidFill>
                       <a:prstDash val="solid"/>
                     </a:lnB>
                     <a:solidFill>
-                      <a:srgbClr val="DCEED3"/>
+                      <a:srgbClr val="D1FAEA"/>
                     </a:solidFill>
                   </a:tcPr>
                 </a:tc>
@@ -4216,25 +4216,25 @@
                   <a:tcPr anchor="ctr" marL="73152" marR="73152">
                     <a:lnL w="9525" cap="flat" cmpd="sng" algn="ctr">
                       <a:solidFill>
-                        <a:srgbClr val="DCEED3"/>
+                        <a:srgbClr val="D1FAEA"/>
                       </a:solidFill>
                       <a:prstDash val="solid"/>
                     </a:lnL>
                     <a:lnR w="9525" cap="flat" cmpd="sng" algn="ctr">
                       <a:solidFill>
-                        <a:srgbClr val="DCEED3"/>
+                        <a:srgbClr val="D1FAEA"/>
                       </a:solidFill>
                       <a:prstDash val="solid"/>
                     </a:lnR>
                     <a:lnT w="9525" cap="flat" cmpd="sng" algn="ctr">
                       <a:solidFill>
-                        <a:srgbClr val="DCEED3"/>
+                        <a:srgbClr val="D1FAEA"/>
                       </a:solidFill>
                       <a:prstDash val="solid"/>
                     </a:lnT>
                     <a:lnB w="9525" cap="flat" cmpd="sng" algn="ctr">
                       <a:solidFill>
-                        <a:srgbClr val="DCEED3"/>
+                        <a:srgbClr val="D1FAEA"/>
                       </a:solidFill>
                       <a:prstDash val="solid"/>
                     </a:lnB>
@@ -4262,25 +4262,25 @@
                   <a:tcPr anchor="ctr" marL="73152" marR="73152">
                     <a:lnL w="9525" cap="flat" cmpd="sng" algn="ctr">
                       <a:solidFill>
-                        <a:srgbClr val="DCEED3"/>
+                        <a:srgbClr val="D1FAEA"/>
                       </a:solidFill>
                       <a:prstDash val="solid"/>
                     </a:lnL>
                     <a:lnR w="9525" cap="flat" cmpd="sng" algn="ctr">
                       <a:solidFill>
-                        <a:srgbClr val="DCEED3"/>
+                        <a:srgbClr val="D1FAEA"/>
                       </a:solidFill>
                       <a:prstDash val="solid"/>
                     </a:lnR>
                     <a:lnT w="9525" cap="flat" cmpd="sng" algn="ctr">
                       <a:solidFill>
-                        <a:srgbClr val="DCEED3"/>
+                        <a:srgbClr val="D1FAEA"/>
                       </a:solidFill>
                       <a:prstDash val="solid"/>
                     </a:lnT>
                     <a:lnB w="9525" cap="flat" cmpd="sng" algn="ctr">
                       <a:solidFill>
-                        <a:srgbClr val="DCEED3"/>
+                        <a:srgbClr val="D1FAEA"/>
                       </a:solidFill>
                       <a:prstDash val="solid"/>
                     </a:lnB>
@@ -4308,25 +4308,25 @@
                   <a:tcPr anchor="ctr" marL="73152" marR="73152">
                     <a:lnL w="9525" cap="flat" cmpd="sng" algn="ctr">
                       <a:solidFill>
-                        <a:srgbClr val="DCEED3"/>
+                        <a:srgbClr val="D1FAEA"/>
                       </a:solidFill>
                       <a:prstDash val="solid"/>
                     </a:lnL>
                     <a:lnR w="9525" cap="flat" cmpd="sng" algn="ctr">
                       <a:solidFill>
-                        <a:srgbClr val="DCEED3"/>
+                        <a:srgbClr val="D1FAEA"/>
                       </a:solidFill>
                       <a:prstDash val="solid"/>
                     </a:lnR>
                     <a:lnT w="9525" cap="flat" cmpd="sng" algn="ctr">
                       <a:solidFill>
-                        <a:srgbClr val="DCEED3"/>
+                        <a:srgbClr val="D1FAEA"/>
                       </a:solidFill>
                       <a:prstDash val="solid"/>
                     </a:lnT>
                     <a:lnB w="9525" cap="flat" cmpd="sng" algn="ctr">
                       <a:solidFill>
-                        <a:srgbClr val="DCEED3"/>
+                        <a:srgbClr val="D1FAEA"/>
                       </a:solidFill>
                       <a:prstDash val="solid"/>
                     </a:lnB>
@@ -4346,7 +4346,7 @@
                       <a:r>
                         <a:rPr sz="1600" b="1">
                           <a:solidFill>
-                            <a:srgbClr val="314F22"/>
+                            <a:srgbClr val="115F41"/>
                           </a:solidFill>
                         </a:rPr>
                         <a:t>메모</a:t>
@@ -4356,30 +4356,30 @@
                   <a:tcPr anchor="ctr" marL="73152" marR="73152">
                     <a:lnL w="9525" cap="flat" cmpd="sng" algn="ctr">
                       <a:solidFill>
-                        <a:srgbClr val="DCEED3"/>
+                        <a:srgbClr val="D1FAEA"/>
                       </a:solidFill>
                       <a:prstDash val="solid"/>
                     </a:lnL>
                     <a:lnR w="9525" cap="flat" cmpd="sng" algn="ctr">
                       <a:solidFill>
-                        <a:srgbClr val="DCEED3"/>
+                        <a:srgbClr val="D1FAEA"/>
                       </a:solidFill>
                       <a:prstDash val="solid"/>
                     </a:lnR>
                     <a:lnT w="9525" cap="flat" cmpd="sng" algn="ctr">
                       <a:solidFill>
-                        <a:srgbClr val="DCEED3"/>
+                        <a:srgbClr val="D1FAEA"/>
                       </a:solidFill>
                       <a:prstDash val="solid"/>
                     </a:lnT>
                     <a:lnB w="9525" cap="flat" cmpd="sng" algn="ctr">
                       <a:solidFill>
-                        <a:srgbClr val="DCEED3"/>
+                        <a:srgbClr val="D1FAEA"/>
                       </a:solidFill>
                       <a:prstDash val="solid"/>
                     </a:lnB>
                     <a:solidFill>
-                      <a:srgbClr val="DCEED3"/>
+                      <a:srgbClr val="D1FAEA"/>
                     </a:solidFill>
                   </a:tcPr>
                 </a:tc>
@@ -4402,30 +4402,30 @@
                   <a:tcPr anchor="ctr" marL="73152" marR="73152">
                     <a:lnL w="9525" cap="flat" cmpd="sng" algn="ctr">
                       <a:solidFill>
-                        <a:srgbClr val="DCEED3"/>
+                        <a:srgbClr val="D1FAEA"/>
                       </a:solidFill>
                       <a:prstDash val="solid"/>
                     </a:lnL>
                     <a:lnR w="9525" cap="flat" cmpd="sng" algn="ctr">
                       <a:solidFill>
-                        <a:srgbClr val="DCEED3"/>
+                        <a:srgbClr val="D1FAEA"/>
                       </a:solidFill>
                       <a:prstDash val="solid"/>
                     </a:lnR>
                     <a:lnT w="9525" cap="flat" cmpd="sng" algn="ctr">
                       <a:solidFill>
-                        <a:srgbClr val="DCEED3"/>
+                        <a:srgbClr val="D1FAEA"/>
                       </a:solidFill>
                       <a:prstDash val="solid"/>
                     </a:lnT>
                     <a:lnB w="9525" cap="flat" cmpd="sng" algn="ctr">
                       <a:solidFill>
-                        <a:srgbClr val="DCEED3"/>
+                        <a:srgbClr val="D1FAEA"/>
                       </a:solidFill>
                       <a:prstDash val="solid"/>
                     </a:lnB>
                     <a:solidFill>
-                      <a:srgbClr val="F3F9F1"/>
+                      <a:srgbClr val="EEFCF6"/>
                     </a:solidFill>
                   </a:tcPr>
                 </a:tc>
@@ -4448,30 +4448,30 @@
                   <a:tcPr anchor="ctr" marL="73152" marR="73152">
                     <a:lnL w="9525" cap="flat" cmpd="sng" algn="ctr">
                       <a:solidFill>
-                        <a:srgbClr val="DCEED3"/>
+                        <a:srgbClr val="D1FAEA"/>
                       </a:solidFill>
                       <a:prstDash val="solid"/>
                     </a:lnL>
                     <a:lnR w="9525" cap="flat" cmpd="sng" algn="ctr">
                       <a:solidFill>
-                        <a:srgbClr val="DCEED3"/>
+                        <a:srgbClr val="D1FAEA"/>
                       </a:solidFill>
                       <a:prstDash val="solid"/>
                     </a:lnR>
                     <a:lnT w="9525" cap="flat" cmpd="sng" algn="ctr">
                       <a:solidFill>
-                        <a:srgbClr val="DCEED3"/>
+                        <a:srgbClr val="D1FAEA"/>
                       </a:solidFill>
                       <a:prstDash val="solid"/>
                     </a:lnT>
                     <a:lnB w="9525" cap="flat" cmpd="sng" algn="ctr">
                       <a:solidFill>
-                        <a:srgbClr val="DCEED3"/>
+                        <a:srgbClr val="D1FAEA"/>
                       </a:solidFill>
                       <a:prstDash val="solid"/>
                     </a:lnB>
                     <a:solidFill>
-                      <a:srgbClr val="F3F9F1"/>
+                      <a:srgbClr val="EEFCF6"/>
                     </a:solidFill>
                   </a:tcPr>
                 </a:tc>
@@ -4494,30 +4494,30 @@
                   <a:tcPr anchor="ctr" marL="73152" marR="73152">
                     <a:lnL w="9525" cap="flat" cmpd="sng" algn="ctr">
                       <a:solidFill>
-                        <a:srgbClr val="DCEED3"/>
+                        <a:srgbClr val="D1FAEA"/>
                       </a:solidFill>
                       <a:prstDash val="solid"/>
                     </a:lnL>
                     <a:lnR w="9525" cap="flat" cmpd="sng" algn="ctr">
                       <a:solidFill>
-                        <a:srgbClr val="DCEED3"/>
+                        <a:srgbClr val="D1FAEA"/>
                       </a:solidFill>
                       <a:prstDash val="solid"/>
                     </a:lnR>
                     <a:lnT w="9525" cap="flat" cmpd="sng" algn="ctr">
                       <a:solidFill>
-                        <a:srgbClr val="DCEED3"/>
+                        <a:srgbClr val="D1FAEA"/>
                       </a:solidFill>
                       <a:prstDash val="solid"/>
                     </a:lnT>
                     <a:lnB w="9525" cap="flat" cmpd="sng" algn="ctr">
                       <a:solidFill>
-                        <a:srgbClr val="DCEED3"/>
+                        <a:srgbClr val="D1FAEA"/>
                       </a:solidFill>
                       <a:prstDash val="solid"/>
                     </a:lnB>
                     <a:solidFill>
-                      <a:srgbClr val="F3F9F1"/>
+                      <a:srgbClr val="EEFCF6"/>
                     </a:solidFill>
                   </a:tcPr>
                 </a:tc>
@@ -4540,7 +4540,7 @@
     <p:bg>
       <p:bgPr>
         <a:solidFill>
-          <a:srgbClr val="F3F9F1"/>
+          <a:srgbClr val="EEFCF6"/>
         </a:solidFill>
         <a:effectLst/>
       </p:bgPr>
@@ -4567,7 +4567,7 @@
             <a:avLst/>
           </a:prstGeom>
           <a:solidFill>
-            <a:srgbClr val="5D9640"/>
+            <a:srgbClr val="26C588"/>
           </a:solidFill>
           <a:ln>
             <a:noFill/>
@@ -4596,7 +4596,7 @@
             <a:avLst/>
           </a:prstGeom>
           <a:solidFill>
-            <a:srgbClr val="4B3D8F"/>
+            <a:srgbClr val="209DB6"/>
           </a:solidFill>
           <a:ln>
             <a:noFill/>
@@ -4640,7 +4640,7 @@
             <a:r>
               <a:rPr sz="3000" b="1" i="0">
                 <a:solidFill>
-                  <a:srgbClr val="314F22"/>
+                  <a:srgbClr val="115F41"/>
                 </a:solidFill>
               </a:rPr>
               <a:t>가입한 보험 목록</a:t>
@@ -4693,30 +4693,30 @@
                   <a:tcPr anchor="ctr" marL="73152" marR="73152">
                     <a:lnL w="9525" cap="flat" cmpd="sng" algn="ctr">
                       <a:solidFill>
-                        <a:srgbClr val="5D9640"/>
+                        <a:srgbClr val="26C588"/>
                       </a:solidFill>
                       <a:prstDash val="solid"/>
                     </a:lnL>
                     <a:lnR w="9525" cap="flat" cmpd="sng" algn="ctr">
                       <a:solidFill>
-                        <a:srgbClr val="5D9640"/>
+                        <a:srgbClr val="26C588"/>
                       </a:solidFill>
                       <a:prstDash val="solid"/>
                     </a:lnR>
                     <a:lnT w="9525" cap="flat" cmpd="sng" algn="ctr">
                       <a:solidFill>
-                        <a:srgbClr val="5D9640"/>
+                        <a:srgbClr val="26C588"/>
                       </a:solidFill>
                       <a:prstDash val="solid"/>
                     </a:lnT>
                     <a:lnB w="9525" cap="flat" cmpd="sng" algn="ctr">
                       <a:solidFill>
-                        <a:srgbClr val="5D9640"/>
+                        <a:srgbClr val="26C588"/>
                       </a:solidFill>
                       <a:prstDash val="solid"/>
                     </a:lnB>
                     <a:solidFill>
-                      <a:srgbClr val="5D9640"/>
+                      <a:srgbClr val="26C588"/>
                     </a:solidFill>
                   </a:tcPr>
                 </a:tc>
@@ -4739,30 +4739,30 @@
                   <a:tcPr anchor="ctr" marL="73152" marR="73152">
                     <a:lnL w="9525" cap="flat" cmpd="sng" algn="ctr">
                       <a:solidFill>
-                        <a:srgbClr val="5D9640"/>
+                        <a:srgbClr val="26C588"/>
                       </a:solidFill>
                       <a:prstDash val="solid"/>
                     </a:lnL>
                     <a:lnR w="9525" cap="flat" cmpd="sng" algn="ctr">
                       <a:solidFill>
-                        <a:srgbClr val="5D9640"/>
+                        <a:srgbClr val="26C588"/>
                       </a:solidFill>
                       <a:prstDash val="solid"/>
                     </a:lnR>
                     <a:lnT w="9525" cap="flat" cmpd="sng" algn="ctr">
                       <a:solidFill>
-                        <a:srgbClr val="5D9640"/>
+                        <a:srgbClr val="26C588"/>
                       </a:solidFill>
                       <a:prstDash val="solid"/>
                     </a:lnT>
                     <a:lnB w="9525" cap="flat" cmpd="sng" algn="ctr">
                       <a:solidFill>
-                        <a:srgbClr val="5D9640"/>
+                        <a:srgbClr val="26C588"/>
                       </a:solidFill>
                       <a:prstDash val="solid"/>
                     </a:lnB>
                     <a:solidFill>
-                      <a:srgbClr val="5D9640"/>
+                      <a:srgbClr val="26C588"/>
                     </a:solidFill>
                   </a:tcPr>
                 </a:tc>
@@ -4785,30 +4785,30 @@
                   <a:tcPr anchor="ctr" marL="73152" marR="73152">
                     <a:lnL w="9525" cap="flat" cmpd="sng" algn="ctr">
                       <a:solidFill>
-                        <a:srgbClr val="5D9640"/>
+                        <a:srgbClr val="26C588"/>
                       </a:solidFill>
                       <a:prstDash val="solid"/>
                     </a:lnL>
                     <a:lnR w="9525" cap="flat" cmpd="sng" algn="ctr">
                       <a:solidFill>
-                        <a:srgbClr val="5D9640"/>
+                        <a:srgbClr val="26C588"/>
                       </a:solidFill>
                       <a:prstDash val="solid"/>
                     </a:lnR>
                     <a:lnT w="9525" cap="flat" cmpd="sng" algn="ctr">
                       <a:solidFill>
-                        <a:srgbClr val="5D9640"/>
+                        <a:srgbClr val="26C588"/>
                       </a:solidFill>
                       <a:prstDash val="solid"/>
                     </a:lnT>
                     <a:lnB w="9525" cap="flat" cmpd="sng" algn="ctr">
                       <a:solidFill>
-                        <a:srgbClr val="5D9640"/>
+                        <a:srgbClr val="26C588"/>
                       </a:solidFill>
                       <a:prstDash val="solid"/>
                     </a:lnB>
                     <a:solidFill>
-                      <a:srgbClr val="5D9640"/>
+                      <a:srgbClr val="26C588"/>
                     </a:solidFill>
                   </a:tcPr>
                 </a:tc>
@@ -4831,30 +4831,30 @@
                   <a:tcPr anchor="ctr" marL="73152" marR="73152">
                     <a:lnL w="9525" cap="flat" cmpd="sng" algn="ctr">
                       <a:solidFill>
-                        <a:srgbClr val="5D9640"/>
+                        <a:srgbClr val="26C588"/>
                       </a:solidFill>
                       <a:prstDash val="solid"/>
                     </a:lnL>
                     <a:lnR w="9525" cap="flat" cmpd="sng" algn="ctr">
                       <a:solidFill>
-                        <a:srgbClr val="5D9640"/>
+                        <a:srgbClr val="26C588"/>
                       </a:solidFill>
                       <a:prstDash val="solid"/>
                     </a:lnR>
                     <a:lnT w="9525" cap="flat" cmpd="sng" algn="ctr">
                       <a:solidFill>
-                        <a:srgbClr val="5D9640"/>
+                        <a:srgbClr val="26C588"/>
                       </a:solidFill>
                       <a:prstDash val="solid"/>
                     </a:lnT>
                     <a:lnB w="9525" cap="flat" cmpd="sng" algn="ctr">
                       <a:solidFill>
-                        <a:srgbClr val="5D9640"/>
+                        <a:srgbClr val="26C588"/>
                       </a:solidFill>
                       <a:prstDash val="solid"/>
                     </a:lnB>
                     <a:solidFill>
-                      <a:srgbClr val="5D9640"/>
+                      <a:srgbClr val="26C588"/>
                     </a:solidFill>
                   </a:tcPr>
                 </a:tc>
@@ -4877,30 +4877,30 @@
                   <a:tcPr anchor="ctr" marL="73152" marR="73152">
                     <a:lnL w="9525" cap="flat" cmpd="sng" algn="ctr">
                       <a:solidFill>
-                        <a:srgbClr val="5D9640"/>
+                        <a:srgbClr val="26C588"/>
                       </a:solidFill>
                       <a:prstDash val="solid"/>
                     </a:lnL>
                     <a:lnR w="9525" cap="flat" cmpd="sng" algn="ctr">
                       <a:solidFill>
-                        <a:srgbClr val="5D9640"/>
+                        <a:srgbClr val="26C588"/>
                       </a:solidFill>
                       <a:prstDash val="solid"/>
                     </a:lnR>
                     <a:lnT w="9525" cap="flat" cmpd="sng" algn="ctr">
                       <a:solidFill>
-                        <a:srgbClr val="5D9640"/>
+                        <a:srgbClr val="26C588"/>
                       </a:solidFill>
                       <a:prstDash val="solid"/>
                     </a:lnT>
                     <a:lnB w="9525" cap="flat" cmpd="sng" algn="ctr">
                       <a:solidFill>
-                        <a:srgbClr val="5D9640"/>
+                        <a:srgbClr val="26C588"/>
                       </a:solidFill>
                       <a:prstDash val="solid"/>
                     </a:lnB>
                     <a:solidFill>
-                      <a:srgbClr val="5D9640"/>
+                      <a:srgbClr val="26C588"/>
                     </a:solidFill>
                   </a:tcPr>
                 </a:tc>
@@ -4925,25 +4925,25 @@
                   <a:tcPr anchor="ctr" marL="73152" marR="73152">
                     <a:lnL w="9525" cap="flat" cmpd="sng" algn="ctr">
                       <a:solidFill>
-                        <a:srgbClr val="DCEED3"/>
+                        <a:srgbClr val="D1FAEA"/>
                       </a:solidFill>
                       <a:prstDash val="solid"/>
                     </a:lnL>
                     <a:lnR w="9525" cap="flat" cmpd="sng" algn="ctr">
                       <a:solidFill>
-                        <a:srgbClr val="DCEED3"/>
+                        <a:srgbClr val="D1FAEA"/>
                       </a:solidFill>
                       <a:prstDash val="solid"/>
                     </a:lnR>
                     <a:lnT w="9525" cap="flat" cmpd="sng" algn="ctr">
                       <a:solidFill>
-                        <a:srgbClr val="DCEED3"/>
+                        <a:srgbClr val="D1FAEA"/>
                       </a:solidFill>
                       <a:prstDash val="solid"/>
                     </a:lnT>
                     <a:lnB w="9525" cap="flat" cmpd="sng" algn="ctr">
                       <a:solidFill>
-                        <a:srgbClr val="DCEED3"/>
+                        <a:srgbClr val="D1FAEA"/>
                       </a:solidFill>
                       <a:prstDash val="solid"/>
                     </a:lnB>
@@ -4971,25 +4971,25 @@
                   <a:tcPr anchor="ctr" marL="73152" marR="73152">
                     <a:lnL w="9525" cap="flat" cmpd="sng" algn="ctr">
                       <a:solidFill>
-                        <a:srgbClr val="DCEED3"/>
+                        <a:srgbClr val="D1FAEA"/>
                       </a:solidFill>
                       <a:prstDash val="solid"/>
                     </a:lnL>
                     <a:lnR w="9525" cap="flat" cmpd="sng" algn="ctr">
                       <a:solidFill>
-                        <a:srgbClr val="DCEED3"/>
+                        <a:srgbClr val="D1FAEA"/>
                       </a:solidFill>
                       <a:prstDash val="solid"/>
                     </a:lnR>
                     <a:lnT w="9525" cap="flat" cmpd="sng" algn="ctr">
                       <a:solidFill>
-                        <a:srgbClr val="DCEED3"/>
+                        <a:srgbClr val="D1FAEA"/>
                       </a:solidFill>
                       <a:prstDash val="solid"/>
                     </a:lnT>
                     <a:lnB w="9525" cap="flat" cmpd="sng" algn="ctr">
                       <a:solidFill>
-                        <a:srgbClr val="DCEED3"/>
+                        <a:srgbClr val="D1FAEA"/>
                       </a:solidFill>
                       <a:prstDash val="solid"/>
                     </a:lnB>
@@ -5017,25 +5017,25 @@
                   <a:tcPr anchor="ctr" marL="73152" marR="73152">
                     <a:lnL w="9525" cap="flat" cmpd="sng" algn="ctr">
                       <a:solidFill>
-                        <a:srgbClr val="DCEED3"/>
+                        <a:srgbClr val="D1FAEA"/>
                       </a:solidFill>
                       <a:prstDash val="solid"/>
                     </a:lnL>
                     <a:lnR w="9525" cap="flat" cmpd="sng" algn="ctr">
                       <a:solidFill>
-                        <a:srgbClr val="DCEED3"/>
+                        <a:srgbClr val="D1FAEA"/>
                       </a:solidFill>
                       <a:prstDash val="solid"/>
                     </a:lnR>
                     <a:lnT w="9525" cap="flat" cmpd="sng" algn="ctr">
                       <a:solidFill>
-                        <a:srgbClr val="DCEED3"/>
+                        <a:srgbClr val="D1FAEA"/>
                       </a:solidFill>
                       <a:prstDash val="solid"/>
                     </a:lnT>
                     <a:lnB w="9525" cap="flat" cmpd="sng" algn="ctr">
                       <a:solidFill>
-                        <a:srgbClr val="DCEED3"/>
+                        <a:srgbClr val="D1FAEA"/>
                       </a:solidFill>
                       <a:prstDash val="solid"/>
                     </a:lnB>
@@ -5063,25 +5063,25 @@
                   <a:tcPr anchor="ctr" marL="73152" marR="73152">
                     <a:lnL w="9525" cap="flat" cmpd="sng" algn="ctr">
                       <a:solidFill>
-                        <a:srgbClr val="DCEED3"/>
+                        <a:srgbClr val="D1FAEA"/>
                       </a:solidFill>
                       <a:prstDash val="solid"/>
                     </a:lnL>
                     <a:lnR w="9525" cap="flat" cmpd="sng" algn="ctr">
                       <a:solidFill>
-                        <a:srgbClr val="DCEED3"/>
+                        <a:srgbClr val="D1FAEA"/>
                       </a:solidFill>
                       <a:prstDash val="solid"/>
                     </a:lnR>
                     <a:lnT w="9525" cap="flat" cmpd="sng" algn="ctr">
                       <a:solidFill>
-                        <a:srgbClr val="DCEED3"/>
+                        <a:srgbClr val="D1FAEA"/>
                       </a:solidFill>
                       <a:prstDash val="solid"/>
                     </a:lnT>
                     <a:lnB w="9525" cap="flat" cmpd="sng" algn="ctr">
                       <a:solidFill>
-                        <a:srgbClr val="DCEED3"/>
+                        <a:srgbClr val="D1FAEA"/>
                       </a:solidFill>
                       <a:prstDash val="solid"/>
                     </a:lnB>
@@ -5109,25 +5109,25 @@
                   <a:tcPr anchor="ctr" marL="73152" marR="73152">
                     <a:lnL w="9525" cap="flat" cmpd="sng" algn="ctr">
                       <a:solidFill>
-                        <a:srgbClr val="DCEED3"/>
+                        <a:srgbClr val="D1FAEA"/>
                       </a:solidFill>
                       <a:prstDash val="solid"/>
                     </a:lnL>
                     <a:lnR w="9525" cap="flat" cmpd="sng" algn="ctr">
                       <a:solidFill>
-                        <a:srgbClr val="DCEED3"/>
+                        <a:srgbClr val="D1FAEA"/>
                       </a:solidFill>
                       <a:prstDash val="solid"/>
                     </a:lnR>
                     <a:lnT w="9525" cap="flat" cmpd="sng" algn="ctr">
                       <a:solidFill>
-                        <a:srgbClr val="DCEED3"/>
+                        <a:srgbClr val="D1FAEA"/>
                       </a:solidFill>
                       <a:prstDash val="solid"/>
                     </a:lnT>
                     <a:lnB w="9525" cap="flat" cmpd="sng" algn="ctr">
                       <a:solidFill>
-                        <a:srgbClr val="DCEED3"/>
+                        <a:srgbClr val="D1FAEA"/>
                       </a:solidFill>
                       <a:prstDash val="solid"/>
                     </a:lnB>
@@ -5157,30 +5157,30 @@
                   <a:tcPr anchor="ctr" marL="73152" marR="73152">
                     <a:lnL w="9525" cap="flat" cmpd="sng" algn="ctr">
                       <a:solidFill>
-                        <a:srgbClr val="DCEED3"/>
+                        <a:srgbClr val="D1FAEA"/>
                       </a:solidFill>
                       <a:prstDash val="solid"/>
                     </a:lnL>
                     <a:lnR w="9525" cap="flat" cmpd="sng" algn="ctr">
                       <a:solidFill>
-                        <a:srgbClr val="DCEED3"/>
+                        <a:srgbClr val="D1FAEA"/>
                       </a:solidFill>
                       <a:prstDash val="solid"/>
                     </a:lnR>
                     <a:lnT w="9525" cap="flat" cmpd="sng" algn="ctr">
                       <a:solidFill>
-                        <a:srgbClr val="DCEED3"/>
+                        <a:srgbClr val="D1FAEA"/>
                       </a:solidFill>
                       <a:prstDash val="solid"/>
                     </a:lnT>
                     <a:lnB w="9525" cap="flat" cmpd="sng" algn="ctr">
                       <a:solidFill>
-                        <a:srgbClr val="DCEED3"/>
+                        <a:srgbClr val="D1FAEA"/>
                       </a:solidFill>
                       <a:prstDash val="solid"/>
                     </a:lnB>
                     <a:solidFill>
-                      <a:srgbClr val="F3F9F1"/>
+                      <a:srgbClr val="EEFCF6"/>
                     </a:solidFill>
                   </a:tcPr>
                 </a:tc>
@@ -5203,30 +5203,30 @@
                   <a:tcPr anchor="ctr" marL="73152" marR="73152">
                     <a:lnL w="9525" cap="flat" cmpd="sng" algn="ctr">
                       <a:solidFill>
-                        <a:srgbClr val="DCEED3"/>
+                        <a:srgbClr val="D1FAEA"/>
                       </a:solidFill>
                       <a:prstDash val="solid"/>
                     </a:lnL>
                     <a:lnR w="9525" cap="flat" cmpd="sng" algn="ctr">
                       <a:solidFill>
-                        <a:srgbClr val="DCEED3"/>
+                        <a:srgbClr val="D1FAEA"/>
                       </a:solidFill>
                       <a:prstDash val="solid"/>
                     </a:lnR>
                     <a:lnT w="9525" cap="flat" cmpd="sng" algn="ctr">
                       <a:solidFill>
-                        <a:srgbClr val="DCEED3"/>
+                        <a:srgbClr val="D1FAEA"/>
                       </a:solidFill>
                       <a:prstDash val="solid"/>
                     </a:lnT>
                     <a:lnB w="9525" cap="flat" cmpd="sng" algn="ctr">
                       <a:solidFill>
-                        <a:srgbClr val="DCEED3"/>
+                        <a:srgbClr val="D1FAEA"/>
                       </a:solidFill>
                       <a:prstDash val="solid"/>
                     </a:lnB>
                     <a:solidFill>
-                      <a:srgbClr val="F3F9F1"/>
+                      <a:srgbClr val="EEFCF6"/>
                     </a:solidFill>
                   </a:tcPr>
                 </a:tc>
@@ -5249,30 +5249,30 @@
                   <a:tcPr anchor="ctr" marL="73152" marR="73152">
                     <a:lnL w="9525" cap="flat" cmpd="sng" algn="ctr">
                       <a:solidFill>
-                        <a:srgbClr val="DCEED3"/>
+                        <a:srgbClr val="D1FAEA"/>
                       </a:solidFill>
                       <a:prstDash val="solid"/>
                     </a:lnL>
                     <a:lnR w="9525" cap="flat" cmpd="sng" algn="ctr">
                       <a:solidFill>
-                        <a:srgbClr val="DCEED3"/>
+                        <a:srgbClr val="D1FAEA"/>
                       </a:solidFill>
                       <a:prstDash val="solid"/>
                     </a:lnR>
                     <a:lnT w="9525" cap="flat" cmpd="sng" algn="ctr">
                       <a:solidFill>
-                        <a:srgbClr val="DCEED3"/>
+                        <a:srgbClr val="D1FAEA"/>
                       </a:solidFill>
                       <a:prstDash val="solid"/>
                     </a:lnT>
                     <a:lnB w="9525" cap="flat" cmpd="sng" algn="ctr">
                       <a:solidFill>
-                        <a:srgbClr val="DCEED3"/>
+                        <a:srgbClr val="D1FAEA"/>
                       </a:solidFill>
                       <a:prstDash val="solid"/>
                     </a:lnB>
                     <a:solidFill>
-                      <a:srgbClr val="F3F9F1"/>
+                      <a:srgbClr val="EEFCF6"/>
                     </a:solidFill>
                   </a:tcPr>
                 </a:tc>
@@ -5295,30 +5295,30 @@
                   <a:tcPr anchor="ctr" marL="73152" marR="73152">
                     <a:lnL w="9525" cap="flat" cmpd="sng" algn="ctr">
                       <a:solidFill>
-                        <a:srgbClr val="DCEED3"/>
+                        <a:srgbClr val="D1FAEA"/>
                       </a:solidFill>
                       <a:prstDash val="solid"/>
                     </a:lnL>
                     <a:lnR w="9525" cap="flat" cmpd="sng" algn="ctr">
                       <a:solidFill>
-                        <a:srgbClr val="DCEED3"/>
+                        <a:srgbClr val="D1FAEA"/>
                       </a:solidFill>
                       <a:prstDash val="solid"/>
                     </a:lnR>
                     <a:lnT w="9525" cap="flat" cmpd="sng" algn="ctr">
                       <a:solidFill>
-                        <a:srgbClr val="DCEED3"/>
+                        <a:srgbClr val="D1FAEA"/>
                       </a:solidFill>
                       <a:prstDash val="solid"/>
                     </a:lnT>
                     <a:lnB w="9525" cap="flat" cmpd="sng" algn="ctr">
                       <a:solidFill>
-                        <a:srgbClr val="DCEED3"/>
+                        <a:srgbClr val="D1FAEA"/>
                       </a:solidFill>
                       <a:prstDash val="solid"/>
                     </a:lnB>
                     <a:solidFill>
-                      <a:srgbClr val="F3F9F1"/>
+                      <a:srgbClr val="EEFCF6"/>
                     </a:solidFill>
                   </a:tcPr>
                 </a:tc>
@@ -5341,30 +5341,30 @@
                   <a:tcPr anchor="ctr" marL="73152" marR="73152">
                     <a:lnL w="9525" cap="flat" cmpd="sng" algn="ctr">
                       <a:solidFill>
-                        <a:srgbClr val="DCEED3"/>
+                        <a:srgbClr val="D1FAEA"/>
                       </a:solidFill>
                       <a:prstDash val="solid"/>
                     </a:lnL>
                     <a:lnR w="9525" cap="flat" cmpd="sng" algn="ctr">
                       <a:solidFill>
-                        <a:srgbClr val="DCEED3"/>
+                        <a:srgbClr val="D1FAEA"/>
                       </a:solidFill>
                       <a:prstDash val="solid"/>
                     </a:lnR>
                     <a:lnT w="9525" cap="flat" cmpd="sng" algn="ctr">
                       <a:solidFill>
-                        <a:srgbClr val="DCEED3"/>
+                        <a:srgbClr val="D1FAEA"/>
                       </a:solidFill>
                       <a:prstDash val="solid"/>
                     </a:lnT>
                     <a:lnB w="9525" cap="flat" cmpd="sng" algn="ctr">
                       <a:solidFill>
-                        <a:srgbClr val="DCEED3"/>
+                        <a:srgbClr val="D1FAEA"/>
                       </a:solidFill>
                       <a:prstDash val="solid"/>
                     </a:lnB>
                     <a:solidFill>
-                      <a:srgbClr val="F3F9F1"/>
+                      <a:srgbClr val="EEFCF6"/>
                     </a:solidFill>
                   </a:tcPr>
                 </a:tc>
@@ -5389,25 +5389,25 @@
                   <a:tcPr anchor="ctr" marL="73152" marR="73152">
                     <a:lnL w="9525" cap="flat" cmpd="sng" algn="ctr">
                       <a:solidFill>
-                        <a:srgbClr val="DCEED3"/>
+                        <a:srgbClr val="D1FAEA"/>
                       </a:solidFill>
                       <a:prstDash val="solid"/>
                     </a:lnL>
                     <a:lnR w="9525" cap="flat" cmpd="sng" algn="ctr">
                       <a:solidFill>
-                        <a:srgbClr val="DCEED3"/>
+                        <a:srgbClr val="D1FAEA"/>
                       </a:solidFill>
                       <a:prstDash val="solid"/>
                     </a:lnR>
                     <a:lnT w="9525" cap="flat" cmpd="sng" algn="ctr">
                       <a:solidFill>
-                        <a:srgbClr val="DCEED3"/>
+                        <a:srgbClr val="D1FAEA"/>
                       </a:solidFill>
                       <a:prstDash val="solid"/>
                     </a:lnT>
                     <a:lnB w="9525" cap="flat" cmpd="sng" algn="ctr">
                       <a:solidFill>
-                        <a:srgbClr val="DCEED3"/>
+                        <a:srgbClr val="D1FAEA"/>
                       </a:solidFill>
                       <a:prstDash val="solid"/>
                     </a:lnB>
@@ -5435,25 +5435,25 @@
                   <a:tcPr anchor="ctr" marL="73152" marR="73152">
                     <a:lnL w="9525" cap="flat" cmpd="sng" algn="ctr">
                       <a:solidFill>
-                        <a:srgbClr val="DCEED3"/>
+                        <a:srgbClr val="D1FAEA"/>
                       </a:solidFill>
                       <a:prstDash val="solid"/>
                     </a:lnL>
                     <a:lnR w="9525" cap="flat" cmpd="sng" algn="ctr">
                       <a:solidFill>
-                        <a:srgbClr val="DCEED3"/>
+                        <a:srgbClr val="D1FAEA"/>
                       </a:solidFill>
                       <a:prstDash val="solid"/>
                     </a:lnR>
                     <a:lnT w="9525" cap="flat" cmpd="sng" algn="ctr">
                       <a:solidFill>
-                        <a:srgbClr val="DCEED3"/>
+                        <a:srgbClr val="D1FAEA"/>
                       </a:solidFill>
                       <a:prstDash val="solid"/>
                     </a:lnT>
                     <a:lnB w="9525" cap="flat" cmpd="sng" algn="ctr">
                       <a:solidFill>
-                        <a:srgbClr val="DCEED3"/>
+                        <a:srgbClr val="D1FAEA"/>
                       </a:solidFill>
                       <a:prstDash val="solid"/>
                     </a:lnB>
@@ -5481,25 +5481,25 @@
                   <a:tcPr anchor="ctr" marL="73152" marR="73152">
                     <a:lnL w="9525" cap="flat" cmpd="sng" algn="ctr">
                       <a:solidFill>
-                        <a:srgbClr val="DCEED3"/>
+                        <a:srgbClr val="D1FAEA"/>
                       </a:solidFill>
                       <a:prstDash val="solid"/>
                     </a:lnL>
                     <a:lnR w="9525" cap="flat" cmpd="sng" algn="ctr">
                       <a:solidFill>
-                        <a:srgbClr val="DCEED3"/>
+                        <a:srgbClr val="D1FAEA"/>
                       </a:solidFill>
                       <a:prstDash val="solid"/>
                     </a:lnR>
                     <a:lnT w="9525" cap="flat" cmpd="sng" algn="ctr">
                       <a:solidFill>
-                        <a:srgbClr val="DCEED3"/>
+                        <a:srgbClr val="D1FAEA"/>
                       </a:solidFill>
                       <a:prstDash val="solid"/>
                     </a:lnT>
                     <a:lnB w="9525" cap="flat" cmpd="sng" algn="ctr">
                       <a:solidFill>
-                        <a:srgbClr val="DCEED3"/>
+                        <a:srgbClr val="D1FAEA"/>
                       </a:solidFill>
                       <a:prstDash val="solid"/>
                     </a:lnB>
@@ -5527,25 +5527,25 @@
                   <a:tcPr anchor="ctr" marL="73152" marR="73152">
                     <a:lnL w="9525" cap="flat" cmpd="sng" algn="ctr">
                       <a:solidFill>
-                        <a:srgbClr val="DCEED3"/>
+                        <a:srgbClr val="D1FAEA"/>
                       </a:solidFill>
                       <a:prstDash val="solid"/>
                     </a:lnL>
                     <a:lnR w="9525" cap="flat" cmpd="sng" algn="ctr">
                       <a:solidFill>
-                        <a:srgbClr val="DCEED3"/>
+                        <a:srgbClr val="D1FAEA"/>
                       </a:solidFill>
                       <a:prstDash val="solid"/>
                     </a:lnR>
                     <a:lnT w="9525" cap="flat" cmpd="sng" algn="ctr">
                       <a:solidFill>
-                        <a:srgbClr val="DCEED3"/>
+                        <a:srgbClr val="D1FAEA"/>
                       </a:solidFill>
                       <a:prstDash val="solid"/>
                     </a:lnT>
                     <a:lnB w="9525" cap="flat" cmpd="sng" algn="ctr">
                       <a:solidFill>
-                        <a:srgbClr val="DCEED3"/>
+                        <a:srgbClr val="D1FAEA"/>
                       </a:solidFill>
                       <a:prstDash val="solid"/>
                     </a:lnB>
@@ -5573,25 +5573,25 @@
                   <a:tcPr anchor="ctr" marL="73152" marR="73152">
                     <a:lnL w="9525" cap="flat" cmpd="sng" algn="ctr">
                       <a:solidFill>
-                        <a:srgbClr val="DCEED3"/>
+                        <a:srgbClr val="D1FAEA"/>
                       </a:solidFill>
                       <a:prstDash val="solid"/>
                     </a:lnL>
                     <a:lnR w="9525" cap="flat" cmpd="sng" algn="ctr">
                       <a:solidFill>
-                        <a:srgbClr val="DCEED3"/>
+                        <a:srgbClr val="D1FAEA"/>
                       </a:solidFill>
                       <a:prstDash val="solid"/>
                     </a:lnR>
                     <a:lnT w="9525" cap="flat" cmpd="sng" algn="ctr">
                       <a:solidFill>
-                        <a:srgbClr val="DCEED3"/>
+                        <a:srgbClr val="D1FAEA"/>
                       </a:solidFill>
                       <a:prstDash val="solid"/>
                     </a:lnT>
                     <a:lnB w="9525" cap="flat" cmpd="sng" algn="ctr">
                       <a:solidFill>
-                        <a:srgbClr val="DCEED3"/>
+                        <a:srgbClr val="D1FAEA"/>
                       </a:solidFill>
                       <a:prstDash val="solid"/>
                     </a:lnB>
@@ -5621,30 +5621,30 @@
                   <a:tcPr anchor="ctr" marL="73152" marR="73152">
                     <a:lnL w="9525" cap="flat" cmpd="sng" algn="ctr">
                       <a:solidFill>
-                        <a:srgbClr val="DCEED3"/>
+                        <a:srgbClr val="D1FAEA"/>
                       </a:solidFill>
                       <a:prstDash val="solid"/>
                     </a:lnL>
                     <a:lnR w="9525" cap="flat" cmpd="sng" algn="ctr">
                       <a:solidFill>
-                        <a:srgbClr val="DCEED3"/>
+                        <a:srgbClr val="D1FAEA"/>
                       </a:solidFill>
                       <a:prstDash val="solid"/>
                     </a:lnR>
                     <a:lnT w="9525" cap="flat" cmpd="sng" algn="ctr">
                       <a:solidFill>
-                        <a:srgbClr val="DCEED3"/>
+                        <a:srgbClr val="D1FAEA"/>
                       </a:solidFill>
                       <a:prstDash val="solid"/>
                     </a:lnT>
                     <a:lnB w="9525" cap="flat" cmpd="sng" algn="ctr">
                       <a:solidFill>
-                        <a:srgbClr val="DCEED3"/>
+                        <a:srgbClr val="D1FAEA"/>
                       </a:solidFill>
                       <a:prstDash val="solid"/>
                     </a:lnB>
                     <a:solidFill>
-                      <a:srgbClr val="F3F9F1"/>
+                      <a:srgbClr val="EEFCF6"/>
                     </a:solidFill>
                   </a:tcPr>
                 </a:tc>
@@ -5667,30 +5667,30 @@
                   <a:tcPr anchor="ctr" marL="73152" marR="73152">
                     <a:lnL w="9525" cap="flat" cmpd="sng" algn="ctr">
                       <a:solidFill>
-                        <a:srgbClr val="DCEED3"/>
+                        <a:srgbClr val="D1FAEA"/>
                       </a:solidFill>
                       <a:prstDash val="solid"/>
                     </a:lnL>
                     <a:lnR w="9525" cap="flat" cmpd="sng" algn="ctr">
                       <a:solidFill>
-                        <a:srgbClr val="DCEED3"/>
+                        <a:srgbClr val="D1FAEA"/>
                       </a:solidFill>
                       <a:prstDash val="solid"/>
                     </a:lnR>
                     <a:lnT w="9525" cap="flat" cmpd="sng" algn="ctr">
                       <a:solidFill>
-                        <a:srgbClr val="DCEED3"/>
+                        <a:srgbClr val="D1FAEA"/>
                       </a:solidFill>
                       <a:prstDash val="solid"/>
                     </a:lnT>
                     <a:lnB w="9525" cap="flat" cmpd="sng" algn="ctr">
                       <a:solidFill>
-                        <a:srgbClr val="DCEED3"/>
+                        <a:srgbClr val="D1FAEA"/>
                       </a:solidFill>
                       <a:prstDash val="solid"/>
                     </a:lnB>
                     <a:solidFill>
-                      <a:srgbClr val="F3F9F1"/>
+                      <a:srgbClr val="EEFCF6"/>
                     </a:solidFill>
                   </a:tcPr>
                 </a:tc>
@@ -5713,30 +5713,30 @@
                   <a:tcPr anchor="ctr" marL="73152" marR="73152">
                     <a:lnL w="9525" cap="flat" cmpd="sng" algn="ctr">
                       <a:solidFill>
-                        <a:srgbClr val="DCEED3"/>
+                        <a:srgbClr val="D1FAEA"/>
                       </a:solidFill>
                       <a:prstDash val="solid"/>
                     </a:lnL>
                     <a:lnR w="9525" cap="flat" cmpd="sng" algn="ctr">
                       <a:solidFill>
-                        <a:srgbClr val="DCEED3"/>
+                        <a:srgbClr val="D1FAEA"/>
                       </a:solidFill>
                       <a:prstDash val="solid"/>
                     </a:lnR>
                     <a:lnT w="9525" cap="flat" cmpd="sng" algn="ctr">
                       <a:solidFill>
-                        <a:srgbClr val="DCEED3"/>
+                        <a:srgbClr val="D1FAEA"/>
                       </a:solidFill>
                       <a:prstDash val="solid"/>
                     </a:lnT>
                     <a:lnB w="9525" cap="flat" cmpd="sng" algn="ctr">
                       <a:solidFill>
-                        <a:srgbClr val="DCEED3"/>
+                        <a:srgbClr val="D1FAEA"/>
                       </a:solidFill>
                       <a:prstDash val="solid"/>
                     </a:lnB>
                     <a:solidFill>
-                      <a:srgbClr val="F3F9F1"/>
+                      <a:srgbClr val="EEFCF6"/>
                     </a:solidFill>
                   </a:tcPr>
                 </a:tc>
@@ -5759,30 +5759,30 @@
                   <a:tcPr anchor="ctr" marL="73152" marR="73152">
                     <a:lnL w="9525" cap="flat" cmpd="sng" algn="ctr">
                       <a:solidFill>
-                        <a:srgbClr val="DCEED3"/>
+                        <a:srgbClr val="D1FAEA"/>
                       </a:solidFill>
                       <a:prstDash val="solid"/>
                     </a:lnL>
                     <a:lnR w="9525" cap="flat" cmpd="sng" algn="ctr">
                       <a:solidFill>
-                        <a:srgbClr val="DCEED3"/>
+                        <a:srgbClr val="D1FAEA"/>
                       </a:solidFill>
                       <a:prstDash val="solid"/>
                     </a:lnR>
                     <a:lnT w="9525" cap="flat" cmpd="sng" algn="ctr">
                       <a:solidFill>
-                        <a:srgbClr val="DCEED3"/>
+                        <a:srgbClr val="D1FAEA"/>
                       </a:solidFill>
                       <a:prstDash val="solid"/>
                     </a:lnT>
                     <a:lnB w="9525" cap="flat" cmpd="sng" algn="ctr">
                       <a:solidFill>
-                        <a:srgbClr val="DCEED3"/>
+                        <a:srgbClr val="D1FAEA"/>
                       </a:solidFill>
                       <a:prstDash val="solid"/>
                     </a:lnB>
                     <a:solidFill>
-                      <a:srgbClr val="F3F9F1"/>
+                      <a:srgbClr val="EEFCF6"/>
                     </a:solidFill>
                   </a:tcPr>
                 </a:tc>
@@ -5805,30 +5805,30 @@
                   <a:tcPr anchor="ctr" marL="73152" marR="73152">
                     <a:lnL w="9525" cap="flat" cmpd="sng" algn="ctr">
                       <a:solidFill>
-                        <a:srgbClr val="DCEED3"/>
+                        <a:srgbClr val="D1FAEA"/>
                       </a:solidFill>
                       <a:prstDash val="solid"/>
                     </a:lnL>
                     <a:lnR w="9525" cap="flat" cmpd="sng" algn="ctr">
                       <a:solidFill>
-                        <a:srgbClr val="DCEED3"/>
+                        <a:srgbClr val="D1FAEA"/>
                       </a:solidFill>
                       <a:prstDash val="solid"/>
                     </a:lnR>
                     <a:lnT w="9525" cap="flat" cmpd="sng" algn="ctr">
                       <a:solidFill>
-                        <a:srgbClr val="DCEED3"/>
+                        <a:srgbClr val="D1FAEA"/>
                       </a:solidFill>
                       <a:prstDash val="solid"/>
                     </a:lnT>
                     <a:lnB w="9525" cap="flat" cmpd="sng" algn="ctr">
                       <a:solidFill>
-                        <a:srgbClr val="DCEED3"/>
+                        <a:srgbClr val="D1FAEA"/>
                       </a:solidFill>
                       <a:prstDash val="solid"/>
                     </a:lnB>
                     <a:solidFill>
-                      <a:srgbClr val="F3F9F1"/>
+                      <a:srgbClr val="EEFCF6"/>
                     </a:solidFill>
                   </a:tcPr>
                 </a:tc>
@@ -5853,25 +5853,25 @@
                   <a:tcPr anchor="ctr" marL="73152" marR="73152">
                     <a:lnL w="9525" cap="flat" cmpd="sng" algn="ctr">
                       <a:solidFill>
-                        <a:srgbClr val="DCEED3"/>
+                        <a:srgbClr val="D1FAEA"/>
                       </a:solidFill>
                       <a:prstDash val="solid"/>
                     </a:lnL>
                     <a:lnR w="9525" cap="flat" cmpd="sng" algn="ctr">
                       <a:solidFill>
-                        <a:srgbClr val="DCEED3"/>
+                        <a:srgbClr val="D1FAEA"/>
                       </a:solidFill>
                       <a:prstDash val="solid"/>
                     </a:lnR>
                     <a:lnT w="9525" cap="flat" cmpd="sng" algn="ctr">
                       <a:solidFill>
-                        <a:srgbClr val="DCEED3"/>
+                        <a:srgbClr val="D1FAEA"/>
                       </a:solidFill>
                       <a:prstDash val="solid"/>
                     </a:lnT>
                     <a:lnB w="9525" cap="flat" cmpd="sng" algn="ctr">
                       <a:solidFill>
-                        <a:srgbClr val="DCEED3"/>
+                        <a:srgbClr val="D1FAEA"/>
                       </a:solidFill>
                       <a:prstDash val="solid"/>
                     </a:lnB>
@@ -5899,25 +5899,25 @@
                   <a:tcPr anchor="ctr" marL="73152" marR="73152">
                     <a:lnL w="9525" cap="flat" cmpd="sng" algn="ctr">
                       <a:solidFill>
-                        <a:srgbClr val="DCEED3"/>
+                        <a:srgbClr val="D1FAEA"/>
                       </a:solidFill>
                       <a:prstDash val="solid"/>
                     </a:lnL>
                     <a:lnR w="9525" cap="flat" cmpd="sng" algn="ctr">
                       <a:solidFill>
-                        <a:srgbClr val="DCEED3"/>
+                        <a:srgbClr val="D1FAEA"/>
                       </a:solidFill>
                       <a:prstDash val="solid"/>
                     </a:lnR>
                     <a:lnT w="9525" cap="flat" cmpd="sng" algn="ctr">
                       <a:solidFill>
-                        <a:srgbClr val="DCEED3"/>
+                        <a:srgbClr val="D1FAEA"/>
                       </a:solidFill>
                       <a:prstDash val="solid"/>
                     </a:lnT>
                     <a:lnB w="9525" cap="flat" cmpd="sng" algn="ctr">
                       <a:solidFill>
-                        <a:srgbClr val="DCEED3"/>
+                        <a:srgbClr val="D1FAEA"/>
                       </a:solidFill>
                       <a:prstDash val="solid"/>
                     </a:lnB>
@@ -5945,25 +5945,25 @@
                   <a:tcPr anchor="ctr" marL="73152" marR="73152">
                     <a:lnL w="9525" cap="flat" cmpd="sng" algn="ctr">
                       <a:solidFill>
-                        <a:srgbClr val="DCEED3"/>
+                        <a:srgbClr val="D1FAEA"/>
                       </a:solidFill>
                       <a:prstDash val="solid"/>
                     </a:lnL>
                     <a:lnR w="9525" cap="flat" cmpd="sng" algn="ctr">
                       <a:solidFill>
-                        <a:srgbClr val="DCEED3"/>
+                        <a:srgbClr val="D1FAEA"/>
                       </a:solidFill>
                       <a:prstDash val="solid"/>
                     </a:lnR>
                     <a:lnT w="9525" cap="flat" cmpd="sng" algn="ctr">
                       <a:solidFill>
-                        <a:srgbClr val="DCEED3"/>
+                        <a:srgbClr val="D1FAEA"/>
                       </a:solidFill>
                       <a:prstDash val="solid"/>
                     </a:lnT>
                     <a:lnB w="9525" cap="flat" cmpd="sng" algn="ctr">
                       <a:solidFill>
-                        <a:srgbClr val="DCEED3"/>
+                        <a:srgbClr val="D1FAEA"/>
                       </a:solidFill>
                       <a:prstDash val="solid"/>
                     </a:lnB>
@@ -5991,25 +5991,25 @@
                   <a:tcPr anchor="ctr" marL="73152" marR="73152">
                     <a:lnL w="9525" cap="flat" cmpd="sng" algn="ctr">
                       <a:solidFill>
-                        <a:srgbClr val="DCEED3"/>
+                        <a:srgbClr val="D1FAEA"/>
                       </a:solidFill>
                       <a:prstDash val="solid"/>
                     </a:lnL>
                     <a:lnR w="9525" cap="flat" cmpd="sng" algn="ctr">
                       <a:solidFill>
-                        <a:srgbClr val="DCEED3"/>
+                        <a:srgbClr val="D1FAEA"/>
                       </a:solidFill>
                       <a:prstDash val="solid"/>
                     </a:lnR>
                     <a:lnT w="9525" cap="flat" cmpd="sng" algn="ctr">
                       <a:solidFill>
-                        <a:srgbClr val="DCEED3"/>
+                        <a:srgbClr val="D1FAEA"/>
                       </a:solidFill>
                       <a:prstDash val="solid"/>
                     </a:lnT>
                     <a:lnB w="9525" cap="flat" cmpd="sng" algn="ctr">
                       <a:solidFill>
-                        <a:srgbClr val="DCEED3"/>
+                        <a:srgbClr val="D1FAEA"/>
                       </a:solidFill>
                       <a:prstDash val="solid"/>
                     </a:lnB>
@@ -6037,25 +6037,25 @@
                   <a:tcPr anchor="ctr" marL="73152" marR="73152">
                     <a:lnL w="9525" cap="flat" cmpd="sng" algn="ctr">
                       <a:solidFill>
-                        <a:srgbClr val="DCEED3"/>
+                        <a:srgbClr val="D1FAEA"/>
                       </a:solidFill>
                       <a:prstDash val="solid"/>
                     </a:lnL>
                     <a:lnR w="9525" cap="flat" cmpd="sng" algn="ctr">
                       <a:solidFill>
-                        <a:srgbClr val="DCEED3"/>
+                        <a:srgbClr val="D1FAEA"/>
                       </a:solidFill>
                       <a:prstDash val="solid"/>
                     </a:lnR>
                     <a:lnT w="9525" cap="flat" cmpd="sng" algn="ctr">
                       <a:solidFill>
-                        <a:srgbClr val="DCEED3"/>
+                        <a:srgbClr val="D1FAEA"/>
                       </a:solidFill>
                       <a:prstDash val="solid"/>
                     </a:lnT>
                     <a:lnB w="9525" cap="flat" cmpd="sng" algn="ctr">
                       <a:solidFill>
-                        <a:srgbClr val="DCEED3"/>
+                        <a:srgbClr val="D1FAEA"/>
                       </a:solidFill>
                       <a:prstDash val="solid"/>
                     </a:lnB>
@@ -6085,30 +6085,30 @@
                   <a:tcPr anchor="ctr" marL="73152" marR="73152">
                     <a:lnL w="9525" cap="flat" cmpd="sng" algn="ctr">
                       <a:solidFill>
-                        <a:srgbClr val="DCEED3"/>
+                        <a:srgbClr val="D1FAEA"/>
                       </a:solidFill>
                       <a:prstDash val="solid"/>
                     </a:lnL>
                     <a:lnR w="9525" cap="flat" cmpd="sng" algn="ctr">
                       <a:solidFill>
-                        <a:srgbClr val="DCEED3"/>
+                        <a:srgbClr val="D1FAEA"/>
                       </a:solidFill>
                       <a:prstDash val="solid"/>
                     </a:lnR>
                     <a:lnT w="9525" cap="flat" cmpd="sng" algn="ctr">
                       <a:solidFill>
-                        <a:srgbClr val="DCEED3"/>
+                        <a:srgbClr val="D1FAEA"/>
                       </a:solidFill>
                       <a:prstDash val="solid"/>
                     </a:lnT>
                     <a:lnB w="9525" cap="flat" cmpd="sng" algn="ctr">
                       <a:solidFill>
-                        <a:srgbClr val="DCEED3"/>
+                        <a:srgbClr val="D1FAEA"/>
                       </a:solidFill>
                       <a:prstDash val="solid"/>
                     </a:lnB>
                     <a:solidFill>
-                      <a:srgbClr val="F3F9F1"/>
+                      <a:srgbClr val="EEFCF6"/>
                     </a:solidFill>
                   </a:tcPr>
                 </a:tc>
@@ -6131,30 +6131,30 @@
                   <a:tcPr anchor="ctr" marL="73152" marR="73152">
                     <a:lnL w="9525" cap="flat" cmpd="sng" algn="ctr">
                       <a:solidFill>
-                        <a:srgbClr val="DCEED3"/>
+                        <a:srgbClr val="D1FAEA"/>
                       </a:solidFill>
                       <a:prstDash val="solid"/>
                     </a:lnL>
                     <a:lnR w="9525" cap="flat" cmpd="sng" algn="ctr">
                       <a:solidFill>
-                        <a:srgbClr val="DCEED3"/>
+                        <a:srgbClr val="D1FAEA"/>
                       </a:solidFill>
                       <a:prstDash val="solid"/>
                     </a:lnR>
                     <a:lnT w="9525" cap="flat" cmpd="sng" algn="ctr">
                       <a:solidFill>
-                        <a:srgbClr val="DCEED3"/>
+                        <a:srgbClr val="D1FAEA"/>
                       </a:solidFill>
                       <a:prstDash val="solid"/>
                     </a:lnT>
                     <a:lnB w="9525" cap="flat" cmpd="sng" algn="ctr">
                       <a:solidFill>
-                        <a:srgbClr val="DCEED3"/>
+                        <a:srgbClr val="D1FAEA"/>
                       </a:solidFill>
                       <a:prstDash val="solid"/>
                     </a:lnB>
                     <a:solidFill>
-                      <a:srgbClr val="F3F9F1"/>
+                      <a:srgbClr val="EEFCF6"/>
                     </a:solidFill>
                   </a:tcPr>
                 </a:tc>
@@ -6177,30 +6177,30 @@
                   <a:tcPr anchor="ctr" marL="73152" marR="73152">
                     <a:lnL w="9525" cap="flat" cmpd="sng" algn="ctr">
                       <a:solidFill>
-                        <a:srgbClr val="DCEED3"/>
+                        <a:srgbClr val="D1FAEA"/>
                       </a:solidFill>
                       <a:prstDash val="solid"/>
                     </a:lnL>
                     <a:lnR w="9525" cap="flat" cmpd="sng" algn="ctr">
                       <a:solidFill>
-                        <a:srgbClr val="DCEED3"/>
+                        <a:srgbClr val="D1FAEA"/>
                       </a:solidFill>
                       <a:prstDash val="solid"/>
                     </a:lnR>
                     <a:lnT w="9525" cap="flat" cmpd="sng" algn="ctr">
                       <a:solidFill>
-                        <a:srgbClr val="DCEED3"/>
+                        <a:srgbClr val="D1FAEA"/>
                       </a:solidFill>
                       <a:prstDash val="solid"/>
                     </a:lnT>
                     <a:lnB w="9525" cap="flat" cmpd="sng" algn="ctr">
                       <a:solidFill>
-                        <a:srgbClr val="DCEED3"/>
+                        <a:srgbClr val="D1FAEA"/>
                       </a:solidFill>
                       <a:prstDash val="solid"/>
                     </a:lnB>
                     <a:solidFill>
-                      <a:srgbClr val="F3F9F1"/>
+                      <a:srgbClr val="EEFCF6"/>
                     </a:solidFill>
                   </a:tcPr>
                 </a:tc>
@@ -6223,30 +6223,30 @@
                   <a:tcPr anchor="ctr" marL="73152" marR="73152">
                     <a:lnL w="9525" cap="flat" cmpd="sng" algn="ctr">
                       <a:solidFill>
-                        <a:srgbClr val="DCEED3"/>
+                        <a:srgbClr val="D1FAEA"/>
                       </a:solidFill>
                       <a:prstDash val="solid"/>
                     </a:lnL>
                     <a:lnR w="9525" cap="flat" cmpd="sng" algn="ctr">
                       <a:solidFill>
-                        <a:srgbClr val="DCEED3"/>
+                        <a:srgbClr val="D1FAEA"/>
                       </a:solidFill>
                       <a:prstDash val="solid"/>
                     </a:lnR>
                     <a:lnT w="9525" cap="flat" cmpd="sng" algn="ctr">
                       <a:solidFill>
-                        <a:srgbClr val="DCEED3"/>
+                        <a:srgbClr val="D1FAEA"/>
                       </a:solidFill>
                       <a:prstDash val="solid"/>
                     </a:lnT>
                     <a:lnB w="9525" cap="flat" cmpd="sng" algn="ctr">
                       <a:solidFill>
-                        <a:srgbClr val="DCEED3"/>
+                        <a:srgbClr val="D1FAEA"/>
                       </a:solidFill>
                       <a:prstDash val="solid"/>
                     </a:lnB>
                     <a:solidFill>
-                      <a:srgbClr val="F3F9F1"/>
+                      <a:srgbClr val="EEFCF6"/>
                     </a:solidFill>
                   </a:tcPr>
                 </a:tc>
@@ -6269,30 +6269,30 @@
                   <a:tcPr anchor="ctr" marL="73152" marR="73152">
                     <a:lnL w="9525" cap="flat" cmpd="sng" algn="ctr">
                       <a:solidFill>
-                        <a:srgbClr val="DCEED3"/>
+                        <a:srgbClr val="D1FAEA"/>
                       </a:solidFill>
                       <a:prstDash val="solid"/>
                     </a:lnL>
                     <a:lnR w="9525" cap="flat" cmpd="sng" algn="ctr">
                       <a:solidFill>
-                        <a:srgbClr val="DCEED3"/>
+                        <a:srgbClr val="D1FAEA"/>
                       </a:solidFill>
                       <a:prstDash val="solid"/>
                     </a:lnR>
                     <a:lnT w="9525" cap="flat" cmpd="sng" algn="ctr">
                       <a:solidFill>
-                        <a:srgbClr val="DCEED3"/>
+                        <a:srgbClr val="D1FAEA"/>
                       </a:solidFill>
                       <a:prstDash val="solid"/>
                     </a:lnT>
                     <a:lnB w="9525" cap="flat" cmpd="sng" algn="ctr">
                       <a:solidFill>
-                        <a:srgbClr val="DCEED3"/>
+                        <a:srgbClr val="D1FAEA"/>
                       </a:solidFill>
                       <a:prstDash val="solid"/>
                     </a:lnB>
                     <a:solidFill>
-                      <a:srgbClr val="F3F9F1"/>
+                      <a:srgbClr val="EEFCF6"/>
                     </a:solidFill>
                   </a:tcPr>
                 </a:tc>
@@ -6315,7 +6315,7 @@
     <p:bg>
       <p:bgPr>
         <a:solidFill>
-          <a:srgbClr val="F3F9F1"/>
+          <a:srgbClr val="EEFCF6"/>
         </a:solidFill>
         <a:effectLst/>
       </p:bgPr>
@@ -6342,7 +6342,7 @@
             <a:avLst/>
           </a:prstGeom>
           <a:solidFill>
-            <a:srgbClr val="5D9640"/>
+            <a:srgbClr val="26C588"/>
           </a:solidFill>
           <a:ln>
             <a:noFill/>
@@ -6371,7 +6371,7 @@
             <a:avLst/>
           </a:prstGeom>
           <a:solidFill>
-            <a:srgbClr val="4B3D8F"/>
+            <a:srgbClr val="209DB6"/>
           </a:solidFill>
           <a:ln>
             <a:noFill/>
@@ -6415,7 +6415,7 @@
             <a:r>
               <a:rPr sz="3000" b="1" i="0">
                 <a:solidFill>
-                  <a:srgbClr val="314F22"/>
+                  <a:srgbClr val="115F41"/>
                 </a:solidFill>
               </a:rPr>
               <a:t>보장 항목 체크</a:t>
@@ -6467,30 +6467,30 @@
                   <a:tcPr anchor="ctr" marL="73152" marR="73152">
                     <a:lnL w="9525" cap="flat" cmpd="sng" algn="ctr">
                       <a:solidFill>
-                        <a:srgbClr val="5D9640"/>
+                        <a:srgbClr val="26C588"/>
                       </a:solidFill>
                       <a:prstDash val="solid"/>
                     </a:lnL>
                     <a:lnR w="9525" cap="flat" cmpd="sng" algn="ctr">
                       <a:solidFill>
-                        <a:srgbClr val="5D9640"/>
+                        <a:srgbClr val="26C588"/>
                       </a:solidFill>
                       <a:prstDash val="solid"/>
                     </a:lnR>
                     <a:lnT w="9525" cap="flat" cmpd="sng" algn="ctr">
                       <a:solidFill>
-                        <a:srgbClr val="5D9640"/>
+                        <a:srgbClr val="26C588"/>
                       </a:solidFill>
                       <a:prstDash val="solid"/>
                     </a:lnT>
                     <a:lnB w="9525" cap="flat" cmpd="sng" algn="ctr">
                       <a:solidFill>
-                        <a:srgbClr val="5D9640"/>
+                        <a:srgbClr val="26C588"/>
                       </a:solidFill>
                       <a:prstDash val="solid"/>
                     </a:lnB>
                     <a:solidFill>
-                      <a:srgbClr val="5D9640"/>
+                      <a:srgbClr val="26C588"/>
                     </a:solidFill>
                   </a:tcPr>
                 </a:tc>
@@ -6513,30 +6513,30 @@
                   <a:tcPr anchor="ctr" marL="73152" marR="73152">
                     <a:lnL w="9525" cap="flat" cmpd="sng" algn="ctr">
                       <a:solidFill>
-                        <a:srgbClr val="5D9640"/>
+                        <a:srgbClr val="26C588"/>
                       </a:solidFill>
                       <a:prstDash val="solid"/>
                     </a:lnL>
                     <a:lnR w="9525" cap="flat" cmpd="sng" algn="ctr">
                       <a:solidFill>
-                        <a:srgbClr val="5D9640"/>
+                        <a:srgbClr val="26C588"/>
                       </a:solidFill>
                       <a:prstDash val="solid"/>
                     </a:lnR>
                     <a:lnT w="9525" cap="flat" cmpd="sng" algn="ctr">
                       <a:solidFill>
-                        <a:srgbClr val="5D9640"/>
+                        <a:srgbClr val="26C588"/>
                       </a:solidFill>
                       <a:prstDash val="solid"/>
                     </a:lnT>
                     <a:lnB w="9525" cap="flat" cmpd="sng" algn="ctr">
                       <a:solidFill>
-                        <a:srgbClr val="5D9640"/>
+                        <a:srgbClr val="26C588"/>
                       </a:solidFill>
                       <a:prstDash val="solid"/>
                     </a:lnB>
                     <a:solidFill>
-                      <a:srgbClr val="5D9640"/>
+                      <a:srgbClr val="26C588"/>
                     </a:solidFill>
                   </a:tcPr>
                 </a:tc>
@@ -6559,30 +6559,30 @@
                   <a:tcPr anchor="ctr" marL="73152" marR="73152">
                     <a:lnL w="9525" cap="flat" cmpd="sng" algn="ctr">
                       <a:solidFill>
-                        <a:srgbClr val="5D9640"/>
+                        <a:srgbClr val="26C588"/>
                       </a:solidFill>
                       <a:prstDash val="solid"/>
                     </a:lnL>
                     <a:lnR w="9525" cap="flat" cmpd="sng" algn="ctr">
                       <a:solidFill>
-                        <a:srgbClr val="5D9640"/>
+                        <a:srgbClr val="26C588"/>
                       </a:solidFill>
                       <a:prstDash val="solid"/>
                     </a:lnR>
                     <a:lnT w="9525" cap="flat" cmpd="sng" algn="ctr">
                       <a:solidFill>
-                        <a:srgbClr val="5D9640"/>
+                        <a:srgbClr val="26C588"/>
                       </a:solidFill>
                       <a:prstDash val="solid"/>
                     </a:lnT>
                     <a:lnB w="9525" cap="flat" cmpd="sng" algn="ctr">
                       <a:solidFill>
-                        <a:srgbClr val="5D9640"/>
+                        <a:srgbClr val="26C588"/>
                       </a:solidFill>
                       <a:prstDash val="solid"/>
                     </a:lnB>
                     <a:solidFill>
-                      <a:srgbClr val="5D9640"/>
+                      <a:srgbClr val="26C588"/>
                     </a:solidFill>
                   </a:tcPr>
                 </a:tc>
@@ -6605,30 +6605,30 @@
                   <a:tcPr anchor="ctr" marL="73152" marR="73152">
                     <a:lnL w="9525" cap="flat" cmpd="sng" algn="ctr">
                       <a:solidFill>
-                        <a:srgbClr val="5D9640"/>
+                        <a:srgbClr val="26C588"/>
                       </a:solidFill>
                       <a:prstDash val="solid"/>
                     </a:lnL>
                     <a:lnR w="9525" cap="flat" cmpd="sng" algn="ctr">
                       <a:solidFill>
-                        <a:srgbClr val="5D9640"/>
+                        <a:srgbClr val="26C588"/>
                       </a:solidFill>
                       <a:prstDash val="solid"/>
                     </a:lnR>
                     <a:lnT w="9525" cap="flat" cmpd="sng" algn="ctr">
                       <a:solidFill>
-                        <a:srgbClr val="5D9640"/>
+                        <a:srgbClr val="26C588"/>
                       </a:solidFill>
                       <a:prstDash val="solid"/>
                     </a:lnT>
                     <a:lnB w="9525" cap="flat" cmpd="sng" algn="ctr">
                       <a:solidFill>
-                        <a:srgbClr val="5D9640"/>
+                        <a:srgbClr val="26C588"/>
                       </a:solidFill>
                       <a:prstDash val="solid"/>
                     </a:lnB>
                     <a:solidFill>
-                      <a:srgbClr val="5D9640"/>
+                      <a:srgbClr val="26C588"/>
                     </a:solidFill>
                   </a:tcPr>
                 </a:tc>
@@ -6643,7 +6643,7 @@
                       <a:r>
                         <a:rPr sz="1400" b="1">
                           <a:solidFill>
-                            <a:srgbClr val="314F22"/>
+                            <a:srgbClr val="115F41"/>
                           </a:solidFill>
                         </a:rPr>
                         <a:t>사망·재해</a:t>
@@ -6653,30 +6653,30 @@
                   <a:tcPr anchor="ctr" marL="73152" marR="73152">
                     <a:lnL w="9525" cap="flat" cmpd="sng" algn="ctr">
                       <a:solidFill>
-                        <a:srgbClr val="DCEED3"/>
+                        <a:srgbClr val="D1FAEA"/>
                       </a:solidFill>
                       <a:prstDash val="solid"/>
                     </a:lnL>
                     <a:lnR w="9525" cap="flat" cmpd="sng" algn="ctr">
                       <a:solidFill>
-                        <a:srgbClr val="DCEED3"/>
+                        <a:srgbClr val="D1FAEA"/>
                       </a:solidFill>
                       <a:prstDash val="solid"/>
                     </a:lnR>
                     <a:lnT w="9525" cap="flat" cmpd="sng" algn="ctr">
                       <a:solidFill>
-                        <a:srgbClr val="DCEED3"/>
+                        <a:srgbClr val="D1FAEA"/>
                       </a:solidFill>
                       <a:prstDash val="solid"/>
                     </a:lnT>
                     <a:lnB w="9525" cap="flat" cmpd="sng" algn="ctr">
                       <a:solidFill>
-                        <a:srgbClr val="DCEED3"/>
+                        <a:srgbClr val="D1FAEA"/>
                       </a:solidFill>
                       <a:prstDash val="solid"/>
                     </a:lnB>
                     <a:solidFill>
-                      <a:srgbClr val="DCEED3"/>
+                      <a:srgbClr val="D1FAEA"/>
                     </a:solidFill>
                   </a:tcPr>
                 </a:tc>
@@ -6699,25 +6699,25 @@
                   <a:tcPr anchor="ctr" marL="73152" marR="73152">
                     <a:lnL w="9525" cap="flat" cmpd="sng" algn="ctr">
                       <a:solidFill>
-                        <a:srgbClr val="DCEED3"/>
+                        <a:srgbClr val="D1FAEA"/>
                       </a:solidFill>
                       <a:prstDash val="solid"/>
                     </a:lnL>
                     <a:lnR w="9525" cap="flat" cmpd="sng" algn="ctr">
                       <a:solidFill>
-                        <a:srgbClr val="DCEED3"/>
+                        <a:srgbClr val="D1FAEA"/>
                       </a:solidFill>
                       <a:prstDash val="solid"/>
                     </a:lnR>
                     <a:lnT w="9525" cap="flat" cmpd="sng" algn="ctr">
                       <a:solidFill>
-                        <a:srgbClr val="DCEED3"/>
+                        <a:srgbClr val="D1FAEA"/>
                       </a:solidFill>
                       <a:prstDash val="solid"/>
                     </a:lnT>
                     <a:lnB w="9525" cap="flat" cmpd="sng" algn="ctr">
                       <a:solidFill>
-                        <a:srgbClr val="DCEED3"/>
+                        <a:srgbClr val="D1FAEA"/>
                       </a:solidFill>
                       <a:prstDash val="solid"/>
                     </a:lnB>
@@ -6745,25 +6745,25 @@
                   <a:tcPr anchor="ctr" marL="73152" marR="73152">
                     <a:lnL w="9525" cap="flat" cmpd="sng" algn="ctr">
                       <a:solidFill>
-                        <a:srgbClr val="DCEED3"/>
+                        <a:srgbClr val="D1FAEA"/>
                       </a:solidFill>
                       <a:prstDash val="solid"/>
                     </a:lnL>
                     <a:lnR w="9525" cap="flat" cmpd="sng" algn="ctr">
                       <a:solidFill>
-                        <a:srgbClr val="DCEED3"/>
+                        <a:srgbClr val="D1FAEA"/>
                       </a:solidFill>
                       <a:prstDash val="solid"/>
                     </a:lnR>
                     <a:lnT w="9525" cap="flat" cmpd="sng" algn="ctr">
                       <a:solidFill>
-                        <a:srgbClr val="DCEED3"/>
+                        <a:srgbClr val="D1FAEA"/>
                       </a:solidFill>
                       <a:prstDash val="solid"/>
                     </a:lnT>
                     <a:lnB w="9525" cap="flat" cmpd="sng" algn="ctr">
                       <a:solidFill>
-                        <a:srgbClr val="DCEED3"/>
+                        <a:srgbClr val="D1FAEA"/>
                       </a:solidFill>
                       <a:prstDash val="solid"/>
                     </a:lnB>
@@ -6791,25 +6791,25 @@
                   <a:tcPr anchor="ctr" marL="73152" marR="73152">
                     <a:lnL w="9525" cap="flat" cmpd="sng" algn="ctr">
                       <a:solidFill>
-                        <a:srgbClr val="DCEED3"/>
+                        <a:srgbClr val="D1FAEA"/>
                       </a:solidFill>
                       <a:prstDash val="solid"/>
                     </a:lnL>
                     <a:lnR w="9525" cap="flat" cmpd="sng" algn="ctr">
                       <a:solidFill>
-                        <a:srgbClr val="DCEED3"/>
+                        <a:srgbClr val="D1FAEA"/>
                       </a:solidFill>
                       <a:prstDash val="solid"/>
                     </a:lnR>
                     <a:lnT w="9525" cap="flat" cmpd="sng" algn="ctr">
                       <a:solidFill>
-                        <a:srgbClr val="DCEED3"/>
+                        <a:srgbClr val="D1FAEA"/>
                       </a:solidFill>
                       <a:prstDash val="solid"/>
                     </a:lnT>
                     <a:lnB w="9525" cap="flat" cmpd="sng" algn="ctr">
                       <a:solidFill>
-                        <a:srgbClr val="DCEED3"/>
+                        <a:srgbClr val="D1FAEA"/>
                       </a:solidFill>
                       <a:prstDash val="solid"/>
                     </a:lnB>
@@ -6829,7 +6829,7 @@
                       <a:r>
                         <a:rPr sz="1400" b="1">
                           <a:solidFill>
-                            <a:srgbClr val="314F22"/>
+                            <a:srgbClr val="115F41"/>
                           </a:solidFill>
                         </a:rPr>
                         <a:t>질병 진단</a:t>
@@ -6839,30 +6839,30 @@
                   <a:tcPr anchor="ctr" marL="73152" marR="73152">
                     <a:lnL w="9525" cap="flat" cmpd="sng" algn="ctr">
                       <a:solidFill>
-                        <a:srgbClr val="DCEED3"/>
+                        <a:srgbClr val="D1FAEA"/>
                       </a:solidFill>
                       <a:prstDash val="solid"/>
                     </a:lnL>
                     <a:lnR w="9525" cap="flat" cmpd="sng" algn="ctr">
                       <a:solidFill>
-                        <a:srgbClr val="DCEED3"/>
+                        <a:srgbClr val="D1FAEA"/>
                       </a:solidFill>
                       <a:prstDash val="solid"/>
                     </a:lnR>
                     <a:lnT w="9525" cap="flat" cmpd="sng" algn="ctr">
                       <a:solidFill>
-                        <a:srgbClr val="DCEED3"/>
+                        <a:srgbClr val="D1FAEA"/>
                       </a:solidFill>
                       <a:prstDash val="solid"/>
                     </a:lnT>
                     <a:lnB w="9525" cap="flat" cmpd="sng" algn="ctr">
                       <a:solidFill>
-                        <a:srgbClr val="DCEED3"/>
+                        <a:srgbClr val="D1FAEA"/>
                       </a:solidFill>
                       <a:prstDash val="solid"/>
                     </a:lnB>
                     <a:solidFill>
-                      <a:srgbClr val="DCEED3"/>
+                      <a:srgbClr val="D1FAEA"/>
                     </a:solidFill>
                   </a:tcPr>
                 </a:tc>
@@ -6885,30 +6885,30 @@
                   <a:tcPr anchor="ctr" marL="73152" marR="73152">
                     <a:lnL w="9525" cap="flat" cmpd="sng" algn="ctr">
                       <a:solidFill>
-                        <a:srgbClr val="DCEED3"/>
+                        <a:srgbClr val="D1FAEA"/>
                       </a:solidFill>
                       <a:prstDash val="solid"/>
                     </a:lnL>
                     <a:lnR w="9525" cap="flat" cmpd="sng" algn="ctr">
                       <a:solidFill>
-                        <a:srgbClr val="DCEED3"/>
+                        <a:srgbClr val="D1FAEA"/>
                       </a:solidFill>
                       <a:prstDash val="solid"/>
                     </a:lnR>
                     <a:lnT w="9525" cap="flat" cmpd="sng" algn="ctr">
                       <a:solidFill>
-                        <a:srgbClr val="DCEED3"/>
+                        <a:srgbClr val="D1FAEA"/>
                       </a:solidFill>
                       <a:prstDash val="solid"/>
                     </a:lnT>
                     <a:lnB w="9525" cap="flat" cmpd="sng" algn="ctr">
                       <a:solidFill>
-                        <a:srgbClr val="DCEED3"/>
+                        <a:srgbClr val="D1FAEA"/>
                       </a:solidFill>
                       <a:prstDash val="solid"/>
                     </a:lnB>
                     <a:solidFill>
-                      <a:srgbClr val="F3F9F1"/>
+                      <a:srgbClr val="EEFCF6"/>
                     </a:solidFill>
                   </a:tcPr>
                 </a:tc>
@@ -6931,30 +6931,30 @@
                   <a:tcPr anchor="ctr" marL="73152" marR="73152">
                     <a:lnL w="9525" cap="flat" cmpd="sng" algn="ctr">
                       <a:solidFill>
-                        <a:srgbClr val="DCEED3"/>
+                        <a:srgbClr val="D1FAEA"/>
                       </a:solidFill>
                       <a:prstDash val="solid"/>
                     </a:lnL>
                     <a:lnR w="9525" cap="flat" cmpd="sng" algn="ctr">
                       <a:solidFill>
-                        <a:srgbClr val="DCEED3"/>
+                        <a:srgbClr val="D1FAEA"/>
                       </a:solidFill>
                       <a:prstDash val="solid"/>
                     </a:lnR>
                     <a:lnT w="9525" cap="flat" cmpd="sng" algn="ctr">
                       <a:solidFill>
-                        <a:srgbClr val="DCEED3"/>
+                        <a:srgbClr val="D1FAEA"/>
                       </a:solidFill>
                       <a:prstDash val="solid"/>
                     </a:lnT>
                     <a:lnB w="9525" cap="flat" cmpd="sng" algn="ctr">
                       <a:solidFill>
-                        <a:srgbClr val="DCEED3"/>
+                        <a:srgbClr val="D1FAEA"/>
                       </a:solidFill>
                       <a:prstDash val="solid"/>
                     </a:lnB>
                     <a:solidFill>
-                      <a:srgbClr val="F3F9F1"/>
+                      <a:srgbClr val="EEFCF6"/>
                     </a:solidFill>
                   </a:tcPr>
                 </a:tc>
@@ -6977,30 +6977,30 @@
                   <a:tcPr anchor="ctr" marL="73152" marR="73152">
                     <a:lnL w="9525" cap="flat" cmpd="sng" algn="ctr">
                       <a:solidFill>
-                        <a:srgbClr val="DCEED3"/>
+                        <a:srgbClr val="D1FAEA"/>
                       </a:solidFill>
                       <a:prstDash val="solid"/>
                     </a:lnL>
                     <a:lnR w="9525" cap="flat" cmpd="sng" algn="ctr">
                       <a:solidFill>
-                        <a:srgbClr val="DCEED3"/>
+                        <a:srgbClr val="D1FAEA"/>
                       </a:solidFill>
                       <a:prstDash val="solid"/>
                     </a:lnR>
                     <a:lnT w="9525" cap="flat" cmpd="sng" algn="ctr">
                       <a:solidFill>
-                        <a:srgbClr val="DCEED3"/>
+                        <a:srgbClr val="D1FAEA"/>
                       </a:solidFill>
                       <a:prstDash val="solid"/>
                     </a:lnT>
                     <a:lnB w="9525" cap="flat" cmpd="sng" algn="ctr">
                       <a:solidFill>
-                        <a:srgbClr val="DCEED3"/>
+                        <a:srgbClr val="D1FAEA"/>
                       </a:solidFill>
                       <a:prstDash val="solid"/>
                     </a:lnB>
                     <a:solidFill>
-                      <a:srgbClr val="F3F9F1"/>
+                      <a:srgbClr val="EEFCF6"/>
                     </a:solidFill>
                   </a:tcPr>
                 </a:tc>
@@ -7015,7 +7015,7 @@
                       <a:r>
                         <a:rPr sz="1400" b="1">
                           <a:solidFill>
-                            <a:srgbClr val="314F22"/>
+                            <a:srgbClr val="115F41"/>
                           </a:solidFill>
                         </a:rPr>
                         <a:t>암</a:t>
@@ -7025,30 +7025,30 @@
                   <a:tcPr anchor="ctr" marL="73152" marR="73152">
                     <a:lnL w="9525" cap="flat" cmpd="sng" algn="ctr">
                       <a:solidFill>
-                        <a:srgbClr val="DCEED3"/>
+                        <a:srgbClr val="D1FAEA"/>
                       </a:solidFill>
                       <a:prstDash val="solid"/>
                     </a:lnL>
                     <a:lnR w="9525" cap="flat" cmpd="sng" algn="ctr">
                       <a:solidFill>
-                        <a:srgbClr val="DCEED3"/>
+                        <a:srgbClr val="D1FAEA"/>
                       </a:solidFill>
                       <a:prstDash val="solid"/>
                     </a:lnR>
                     <a:lnT w="9525" cap="flat" cmpd="sng" algn="ctr">
                       <a:solidFill>
-                        <a:srgbClr val="DCEED3"/>
+                        <a:srgbClr val="D1FAEA"/>
                       </a:solidFill>
                       <a:prstDash val="solid"/>
                     </a:lnT>
                     <a:lnB w="9525" cap="flat" cmpd="sng" algn="ctr">
                       <a:solidFill>
-                        <a:srgbClr val="DCEED3"/>
+                        <a:srgbClr val="D1FAEA"/>
                       </a:solidFill>
                       <a:prstDash val="solid"/>
                     </a:lnB>
                     <a:solidFill>
-                      <a:srgbClr val="DCEED3"/>
+                      <a:srgbClr val="D1FAEA"/>
                     </a:solidFill>
                   </a:tcPr>
                 </a:tc>
@@ -7071,25 +7071,25 @@
                   <a:tcPr anchor="ctr" marL="73152" marR="73152">
                     <a:lnL w="9525" cap="flat" cmpd="sng" algn="ctr">
                       <a:solidFill>
-                        <a:srgbClr val="DCEED3"/>
+                        <a:srgbClr val="D1FAEA"/>
                       </a:solidFill>
                       <a:prstDash val="solid"/>
                     </a:lnL>
                     <a:lnR w="9525" cap="flat" cmpd="sng" algn="ctr">
                       <a:solidFill>
-                        <a:srgbClr val="DCEED3"/>
+                        <a:srgbClr val="D1FAEA"/>
                       </a:solidFill>
                       <a:prstDash val="solid"/>
                     </a:lnR>
                     <a:lnT w="9525" cap="flat" cmpd="sng" algn="ctr">
                       <a:solidFill>
-                        <a:srgbClr val="DCEED3"/>
+                        <a:srgbClr val="D1FAEA"/>
                       </a:solidFill>
                       <a:prstDash val="solid"/>
                     </a:lnT>
                     <a:lnB w="9525" cap="flat" cmpd="sng" algn="ctr">
                       <a:solidFill>
-                        <a:srgbClr val="DCEED3"/>
+                        <a:srgbClr val="D1FAEA"/>
                       </a:solidFill>
                       <a:prstDash val="solid"/>
                     </a:lnB>
@@ -7117,25 +7117,25 @@
                   <a:tcPr anchor="ctr" marL="73152" marR="73152">
                     <a:lnL w="9525" cap="flat" cmpd="sng" algn="ctr">
                       <a:solidFill>
-                        <a:srgbClr val="DCEED3"/>
+                        <a:srgbClr val="D1FAEA"/>
                       </a:solidFill>
                       <a:prstDash val="solid"/>
                     </a:lnL>
                     <a:lnR w="9525" cap="flat" cmpd="sng" algn="ctr">
                       <a:solidFill>
-                        <a:srgbClr val="DCEED3"/>
+                        <a:srgbClr val="D1FAEA"/>
                       </a:solidFill>
                       <a:prstDash val="solid"/>
                     </a:lnR>
                     <a:lnT w="9525" cap="flat" cmpd="sng" algn="ctr">
                       <a:solidFill>
-                        <a:srgbClr val="DCEED3"/>
+                        <a:srgbClr val="D1FAEA"/>
                       </a:solidFill>
                       <a:prstDash val="solid"/>
                     </a:lnT>
                     <a:lnB w="9525" cap="flat" cmpd="sng" algn="ctr">
                       <a:solidFill>
-                        <a:srgbClr val="DCEED3"/>
+                        <a:srgbClr val="D1FAEA"/>
                       </a:solidFill>
                       <a:prstDash val="solid"/>
                     </a:lnB>
@@ -7163,25 +7163,25 @@
                   <a:tcPr anchor="ctr" marL="73152" marR="73152">
                     <a:lnL w="9525" cap="flat" cmpd="sng" algn="ctr">
                       <a:solidFill>
-                        <a:srgbClr val="DCEED3"/>
+                        <a:srgbClr val="D1FAEA"/>
                       </a:solidFill>
                       <a:prstDash val="solid"/>
                     </a:lnL>
                     <a:lnR w="9525" cap="flat" cmpd="sng" algn="ctr">
                       <a:solidFill>
-                        <a:srgbClr val="DCEED3"/>
+                        <a:srgbClr val="D1FAEA"/>
                       </a:solidFill>
                       <a:prstDash val="solid"/>
                     </a:lnR>
                     <a:lnT w="9525" cap="flat" cmpd="sng" algn="ctr">
                       <a:solidFill>
-                        <a:srgbClr val="DCEED3"/>
+                        <a:srgbClr val="D1FAEA"/>
                       </a:solidFill>
                       <a:prstDash val="solid"/>
                     </a:lnT>
                     <a:lnB w="9525" cap="flat" cmpd="sng" algn="ctr">
                       <a:solidFill>
-                        <a:srgbClr val="DCEED3"/>
+                        <a:srgbClr val="D1FAEA"/>
                       </a:solidFill>
                       <a:prstDash val="solid"/>
                     </a:lnB>
@@ -7201,7 +7201,7 @@
                       <a:r>
                         <a:rPr sz="1400" b="1">
                           <a:solidFill>
-                            <a:srgbClr val="314F22"/>
+                            <a:srgbClr val="115F41"/>
                           </a:solidFill>
                         </a:rPr>
                         <a:t>뇌·심장</a:t>
@@ -7211,30 +7211,30 @@
                   <a:tcPr anchor="ctr" marL="73152" marR="73152">
                     <a:lnL w="9525" cap="flat" cmpd="sng" algn="ctr">
                       <a:solidFill>
-                        <a:srgbClr val="DCEED3"/>
+                        <a:srgbClr val="D1FAEA"/>
                       </a:solidFill>
                       <a:prstDash val="solid"/>
                     </a:lnL>
                     <a:lnR w="9525" cap="flat" cmpd="sng" algn="ctr">
                       <a:solidFill>
-                        <a:srgbClr val="DCEED3"/>
+                        <a:srgbClr val="D1FAEA"/>
                       </a:solidFill>
                       <a:prstDash val="solid"/>
                     </a:lnR>
                     <a:lnT w="9525" cap="flat" cmpd="sng" algn="ctr">
                       <a:solidFill>
-                        <a:srgbClr val="DCEED3"/>
+                        <a:srgbClr val="D1FAEA"/>
                       </a:solidFill>
                       <a:prstDash val="solid"/>
                     </a:lnT>
                     <a:lnB w="9525" cap="flat" cmpd="sng" algn="ctr">
                       <a:solidFill>
-                        <a:srgbClr val="DCEED3"/>
+                        <a:srgbClr val="D1FAEA"/>
                       </a:solidFill>
                       <a:prstDash val="solid"/>
                     </a:lnB>
                     <a:solidFill>
-                      <a:srgbClr val="DCEED3"/>
+                      <a:srgbClr val="D1FAEA"/>
                     </a:solidFill>
                   </a:tcPr>
                 </a:tc>
@@ -7257,30 +7257,30 @@
                   <a:tcPr anchor="ctr" marL="73152" marR="73152">
                     <a:lnL w="9525" cap="flat" cmpd="sng" algn="ctr">
                       <a:solidFill>
-                        <a:srgbClr val="DCEED3"/>
+                        <a:srgbClr val="D1FAEA"/>
                       </a:solidFill>
                       <a:prstDash val="solid"/>
                     </a:lnL>
                     <a:lnR w="9525" cap="flat" cmpd="sng" algn="ctr">
                       <a:solidFill>
-                        <a:srgbClr val="DCEED3"/>
+                        <a:srgbClr val="D1FAEA"/>
                       </a:solidFill>
                       <a:prstDash val="solid"/>
                     </a:lnR>
                     <a:lnT w="9525" cap="flat" cmpd="sng" algn="ctr">
                       <a:solidFill>
-                        <a:srgbClr val="DCEED3"/>
+                        <a:srgbClr val="D1FAEA"/>
                       </a:solidFill>
                       <a:prstDash val="solid"/>
                     </a:lnT>
                     <a:lnB w="9525" cap="flat" cmpd="sng" algn="ctr">
                       <a:solidFill>
-                        <a:srgbClr val="DCEED3"/>
+                        <a:srgbClr val="D1FAEA"/>
                       </a:solidFill>
                       <a:prstDash val="solid"/>
                     </a:lnB>
                     <a:solidFill>
-                      <a:srgbClr val="F3F9F1"/>
+                      <a:srgbClr val="EEFCF6"/>
                     </a:solidFill>
                   </a:tcPr>
                 </a:tc>
@@ -7303,30 +7303,30 @@
                   <a:tcPr anchor="ctr" marL="73152" marR="73152">
                     <a:lnL w="9525" cap="flat" cmpd="sng" algn="ctr">
                       <a:solidFill>
-                        <a:srgbClr val="DCEED3"/>
+                        <a:srgbClr val="D1FAEA"/>
                       </a:solidFill>
                       <a:prstDash val="solid"/>
                     </a:lnL>
                     <a:lnR w="9525" cap="flat" cmpd="sng" algn="ctr">
                       <a:solidFill>
-                        <a:srgbClr val="DCEED3"/>
+                        <a:srgbClr val="D1FAEA"/>
                       </a:solidFill>
                       <a:prstDash val="solid"/>
                     </a:lnR>
                     <a:lnT w="9525" cap="flat" cmpd="sng" algn="ctr">
                       <a:solidFill>
-                        <a:srgbClr val="DCEED3"/>
+                        <a:srgbClr val="D1FAEA"/>
                       </a:solidFill>
                       <a:prstDash val="solid"/>
                     </a:lnT>
                     <a:lnB w="9525" cap="flat" cmpd="sng" algn="ctr">
                       <a:solidFill>
-                        <a:srgbClr val="DCEED3"/>
+                        <a:srgbClr val="D1FAEA"/>
                       </a:solidFill>
                       <a:prstDash val="solid"/>
                     </a:lnB>
                     <a:solidFill>
-                      <a:srgbClr val="F3F9F1"/>
+                      <a:srgbClr val="EEFCF6"/>
                     </a:solidFill>
                   </a:tcPr>
                 </a:tc>
@@ -7349,30 +7349,30 @@
                   <a:tcPr anchor="ctr" marL="73152" marR="73152">
                     <a:lnL w="9525" cap="flat" cmpd="sng" algn="ctr">
                       <a:solidFill>
-                        <a:srgbClr val="DCEED3"/>
+                        <a:srgbClr val="D1FAEA"/>
                       </a:solidFill>
                       <a:prstDash val="solid"/>
                     </a:lnL>
                     <a:lnR w="9525" cap="flat" cmpd="sng" algn="ctr">
                       <a:solidFill>
-                        <a:srgbClr val="DCEED3"/>
+                        <a:srgbClr val="D1FAEA"/>
                       </a:solidFill>
                       <a:prstDash val="solid"/>
                     </a:lnR>
                     <a:lnT w="9525" cap="flat" cmpd="sng" algn="ctr">
                       <a:solidFill>
-                        <a:srgbClr val="DCEED3"/>
+                        <a:srgbClr val="D1FAEA"/>
                       </a:solidFill>
                       <a:prstDash val="solid"/>
                     </a:lnT>
                     <a:lnB w="9525" cap="flat" cmpd="sng" algn="ctr">
                       <a:solidFill>
-                        <a:srgbClr val="DCEED3"/>
+                        <a:srgbClr val="D1FAEA"/>
                       </a:solidFill>
                       <a:prstDash val="solid"/>
                     </a:lnB>
                     <a:solidFill>
-                      <a:srgbClr val="F3F9F1"/>
+                      <a:srgbClr val="EEFCF6"/>
                     </a:solidFill>
                   </a:tcPr>
                 </a:tc>
@@ -7387,7 +7387,7 @@
                       <a:r>
                         <a:rPr sz="1400" b="1">
                           <a:solidFill>
-                            <a:srgbClr val="314F22"/>
+                            <a:srgbClr val="115F41"/>
                           </a:solidFill>
                         </a:rPr>
                         <a:t>입원·수술</a:t>
@@ -7397,30 +7397,30 @@
                   <a:tcPr anchor="ctr" marL="73152" marR="73152">
                     <a:lnL w="9525" cap="flat" cmpd="sng" algn="ctr">
                       <a:solidFill>
-                        <a:srgbClr val="DCEED3"/>
+                        <a:srgbClr val="D1FAEA"/>
                       </a:solidFill>
                       <a:prstDash val="solid"/>
                     </a:lnL>
                     <a:lnR w="9525" cap="flat" cmpd="sng" algn="ctr">
                       <a:solidFill>
-                        <a:srgbClr val="DCEED3"/>
+                        <a:srgbClr val="D1FAEA"/>
                       </a:solidFill>
                       <a:prstDash val="solid"/>
                     </a:lnR>
                     <a:lnT w="9525" cap="flat" cmpd="sng" algn="ctr">
                       <a:solidFill>
-                        <a:srgbClr val="DCEED3"/>
+                        <a:srgbClr val="D1FAEA"/>
                       </a:solidFill>
                       <a:prstDash val="solid"/>
                     </a:lnT>
                     <a:lnB w="9525" cap="flat" cmpd="sng" algn="ctr">
                       <a:solidFill>
-                        <a:srgbClr val="DCEED3"/>
+                        <a:srgbClr val="D1FAEA"/>
                       </a:solidFill>
                       <a:prstDash val="solid"/>
                     </a:lnB>
                     <a:solidFill>
-                      <a:srgbClr val="DCEED3"/>
+                      <a:srgbClr val="D1FAEA"/>
                     </a:solidFill>
                   </a:tcPr>
                 </a:tc>
@@ -7443,25 +7443,25 @@
                   <a:tcPr anchor="ctr" marL="73152" marR="73152">
                     <a:lnL w="9525" cap="flat" cmpd="sng" algn="ctr">
                       <a:solidFill>
-                        <a:srgbClr val="DCEED3"/>
+                        <a:srgbClr val="D1FAEA"/>
                       </a:solidFill>
                       <a:prstDash val="solid"/>
                     </a:lnL>
                     <a:lnR w="9525" cap="flat" cmpd="sng" algn="ctr">
                       <a:solidFill>
-                        <a:srgbClr val="DCEED3"/>
+                        <a:srgbClr val="D1FAEA"/>
                       </a:solidFill>
                       <a:prstDash val="solid"/>
                     </a:lnR>
                     <a:lnT w="9525" cap="flat" cmpd="sng" algn="ctr">
                       <a:solidFill>
-                        <a:srgbClr val="DCEED3"/>
+                        <a:srgbClr val="D1FAEA"/>
                       </a:solidFill>
                       <a:prstDash val="solid"/>
                     </a:lnT>
                     <a:lnB w="9525" cap="flat" cmpd="sng" algn="ctr">
                       <a:solidFill>
-                        <a:srgbClr val="DCEED3"/>
+                        <a:srgbClr val="D1FAEA"/>
                       </a:solidFill>
                       <a:prstDash val="solid"/>
                     </a:lnB>
@@ -7489,25 +7489,25 @@
                   <a:tcPr anchor="ctr" marL="73152" marR="73152">
                     <a:lnL w="9525" cap="flat" cmpd="sng" algn="ctr">
                       <a:solidFill>
-                        <a:srgbClr val="DCEED3"/>
+                        <a:srgbClr val="D1FAEA"/>
                       </a:solidFill>
                       <a:prstDash val="solid"/>
                     </a:lnL>
                     <a:lnR w="9525" cap="flat" cmpd="sng" algn="ctr">
                       <a:solidFill>
-                        <a:srgbClr val="DCEED3"/>
+                        <a:srgbClr val="D1FAEA"/>
                       </a:solidFill>
                       <a:prstDash val="solid"/>
                     </a:lnR>
                     <a:lnT w="9525" cap="flat" cmpd="sng" algn="ctr">
                       <a:solidFill>
-                        <a:srgbClr val="DCEED3"/>
+                        <a:srgbClr val="D1FAEA"/>
                       </a:solidFill>
                       <a:prstDash val="solid"/>
                     </a:lnT>
                     <a:lnB w="9525" cap="flat" cmpd="sng" algn="ctr">
                       <a:solidFill>
-                        <a:srgbClr val="DCEED3"/>
+                        <a:srgbClr val="D1FAEA"/>
                       </a:solidFill>
                       <a:prstDash val="solid"/>
                     </a:lnB>
@@ -7535,25 +7535,25 @@
                   <a:tcPr anchor="ctr" marL="73152" marR="73152">
                     <a:lnL w="9525" cap="flat" cmpd="sng" algn="ctr">
                       <a:solidFill>
-                        <a:srgbClr val="DCEED3"/>
+                        <a:srgbClr val="D1FAEA"/>
                       </a:solidFill>
                       <a:prstDash val="solid"/>
                     </a:lnL>
                     <a:lnR w="9525" cap="flat" cmpd="sng" algn="ctr">
                       <a:solidFill>
-                        <a:srgbClr val="DCEED3"/>
+                        <a:srgbClr val="D1FAEA"/>
                       </a:solidFill>
                       <a:prstDash val="solid"/>
                     </a:lnR>
                     <a:lnT w="9525" cap="flat" cmpd="sng" algn="ctr">
                       <a:solidFill>
-                        <a:srgbClr val="DCEED3"/>
+                        <a:srgbClr val="D1FAEA"/>
                       </a:solidFill>
                       <a:prstDash val="solid"/>
                     </a:lnT>
                     <a:lnB w="9525" cap="flat" cmpd="sng" algn="ctr">
                       <a:solidFill>
-                        <a:srgbClr val="DCEED3"/>
+                        <a:srgbClr val="D1FAEA"/>
                       </a:solidFill>
                       <a:prstDash val="solid"/>
                     </a:lnB>
@@ -7573,7 +7573,7 @@
                       <a:r>
                         <a:rPr sz="1400" b="1">
                           <a:solidFill>
-                            <a:srgbClr val="314F22"/>
+                            <a:srgbClr val="115F41"/>
                           </a:solidFill>
                         </a:rPr>
                         <a:t>상해</a:t>
@@ -7583,30 +7583,30 @@
                   <a:tcPr anchor="ctr" marL="73152" marR="73152">
                     <a:lnL w="9525" cap="flat" cmpd="sng" algn="ctr">
                       <a:solidFill>
-                        <a:srgbClr val="DCEED3"/>
+                        <a:srgbClr val="D1FAEA"/>
                       </a:solidFill>
                       <a:prstDash val="solid"/>
                     </a:lnL>
                     <a:lnR w="9525" cap="flat" cmpd="sng" algn="ctr">
                       <a:solidFill>
-                        <a:srgbClr val="DCEED3"/>
+                        <a:srgbClr val="D1FAEA"/>
                       </a:solidFill>
                       <a:prstDash val="solid"/>
                     </a:lnR>
                     <a:lnT w="9525" cap="flat" cmpd="sng" algn="ctr">
                       <a:solidFill>
-                        <a:srgbClr val="DCEED3"/>
+                        <a:srgbClr val="D1FAEA"/>
                       </a:solidFill>
                       <a:prstDash val="solid"/>
                     </a:lnT>
                     <a:lnB w="9525" cap="flat" cmpd="sng" algn="ctr">
                       <a:solidFill>
-                        <a:srgbClr val="DCEED3"/>
+                        <a:srgbClr val="D1FAEA"/>
                       </a:solidFill>
                       <a:prstDash val="solid"/>
                     </a:lnB>
                     <a:solidFill>
-                      <a:srgbClr val="DCEED3"/>
+                      <a:srgbClr val="D1FAEA"/>
                     </a:solidFill>
                   </a:tcPr>
                 </a:tc>
@@ -7629,30 +7629,30 @@
                   <a:tcPr anchor="ctr" marL="73152" marR="73152">
                     <a:lnL w="9525" cap="flat" cmpd="sng" algn="ctr">
                       <a:solidFill>
-                        <a:srgbClr val="DCEED3"/>
+                        <a:srgbClr val="D1FAEA"/>
                       </a:solidFill>
                       <a:prstDash val="solid"/>
                     </a:lnL>
                     <a:lnR w="9525" cap="flat" cmpd="sng" algn="ctr">
                       <a:solidFill>
-                        <a:srgbClr val="DCEED3"/>
+                        <a:srgbClr val="D1FAEA"/>
                       </a:solidFill>
                       <a:prstDash val="solid"/>
                     </a:lnR>
                     <a:lnT w="9525" cap="flat" cmpd="sng" algn="ctr">
                       <a:solidFill>
-                        <a:srgbClr val="DCEED3"/>
+                        <a:srgbClr val="D1FAEA"/>
                       </a:solidFill>
                       <a:prstDash val="solid"/>
                     </a:lnT>
                     <a:lnB w="9525" cap="flat" cmpd="sng" algn="ctr">
                       <a:solidFill>
-                        <a:srgbClr val="DCEED3"/>
+                        <a:srgbClr val="D1FAEA"/>
                       </a:solidFill>
                       <a:prstDash val="solid"/>
                     </a:lnB>
                     <a:solidFill>
-                      <a:srgbClr val="F3F9F1"/>
+                      <a:srgbClr val="EEFCF6"/>
                     </a:solidFill>
                   </a:tcPr>
                 </a:tc>
@@ -7675,30 +7675,30 @@
                   <a:tcPr anchor="ctr" marL="73152" marR="73152">
                     <a:lnL w="9525" cap="flat" cmpd="sng" algn="ctr">
                       <a:solidFill>
-                        <a:srgbClr val="DCEED3"/>
+                        <a:srgbClr val="D1FAEA"/>
                       </a:solidFill>
                       <a:prstDash val="solid"/>
                     </a:lnL>
                     <a:lnR w="9525" cap="flat" cmpd="sng" algn="ctr">
                       <a:solidFill>
-                        <a:srgbClr val="DCEED3"/>
+                        <a:srgbClr val="D1FAEA"/>
                       </a:solidFill>
                       <a:prstDash val="solid"/>
                     </a:lnR>
                     <a:lnT w="9525" cap="flat" cmpd="sng" algn="ctr">
                       <a:solidFill>
-                        <a:srgbClr val="DCEED3"/>
+                        <a:srgbClr val="D1FAEA"/>
                       </a:solidFill>
                       <a:prstDash val="solid"/>
                     </a:lnT>
                     <a:lnB w="9525" cap="flat" cmpd="sng" algn="ctr">
                       <a:solidFill>
-                        <a:srgbClr val="DCEED3"/>
+                        <a:srgbClr val="D1FAEA"/>
                       </a:solidFill>
                       <a:prstDash val="solid"/>
                     </a:lnB>
                     <a:solidFill>
-                      <a:srgbClr val="F3F9F1"/>
+                      <a:srgbClr val="EEFCF6"/>
                     </a:solidFill>
                   </a:tcPr>
                 </a:tc>
@@ -7721,30 +7721,30 @@
                   <a:tcPr anchor="ctr" marL="73152" marR="73152">
                     <a:lnL w="9525" cap="flat" cmpd="sng" algn="ctr">
                       <a:solidFill>
-                        <a:srgbClr val="DCEED3"/>
+                        <a:srgbClr val="D1FAEA"/>
                       </a:solidFill>
                       <a:prstDash val="solid"/>
                     </a:lnL>
                     <a:lnR w="9525" cap="flat" cmpd="sng" algn="ctr">
                       <a:solidFill>
-                        <a:srgbClr val="DCEED3"/>
+                        <a:srgbClr val="D1FAEA"/>
                       </a:solidFill>
                       <a:prstDash val="solid"/>
                     </a:lnR>
                     <a:lnT w="9525" cap="flat" cmpd="sng" algn="ctr">
                       <a:solidFill>
-                        <a:srgbClr val="DCEED3"/>
+                        <a:srgbClr val="D1FAEA"/>
                       </a:solidFill>
                       <a:prstDash val="solid"/>
                     </a:lnT>
                     <a:lnB w="9525" cap="flat" cmpd="sng" algn="ctr">
                       <a:solidFill>
-                        <a:srgbClr val="DCEED3"/>
+                        <a:srgbClr val="D1FAEA"/>
                       </a:solidFill>
                       <a:prstDash val="solid"/>
                     </a:lnB>
                     <a:solidFill>
-                      <a:srgbClr val="F3F9F1"/>
+                      <a:srgbClr val="EEFCF6"/>
                     </a:solidFill>
                   </a:tcPr>
                 </a:tc>
@@ -7759,7 +7759,7 @@
                       <a:r>
                         <a:rPr sz="1400" b="1">
                           <a:solidFill>
-                            <a:srgbClr val="314F22"/>
+                            <a:srgbClr val="115F41"/>
                           </a:solidFill>
                         </a:rPr>
                         <a:t>실손의료</a:t>
@@ -7769,30 +7769,30 @@
                   <a:tcPr anchor="ctr" marL="73152" marR="73152">
                     <a:lnL w="9525" cap="flat" cmpd="sng" algn="ctr">
                       <a:solidFill>
-                        <a:srgbClr val="DCEED3"/>
+                        <a:srgbClr val="D1FAEA"/>
                       </a:solidFill>
                       <a:prstDash val="solid"/>
                     </a:lnL>
                     <a:lnR w="9525" cap="flat" cmpd="sng" algn="ctr">
                       <a:solidFill>
-                        <a:srgbClr val="DCEED3"/>
+                        <a:srgbClr val="D1FAEA"/>
                       </a:solidFill>
                       <a:prstDash val="solid"/>
                     </a:lnR>
                     <a:lnT w="9525" cap="flat" cmpd="sng" algn="ctr">
                       <a:solidFill>
-                        <a:srgbClr val="DCEED3"/>
+                        <a:srgbClr val="D1FAEA"/>
                       </a:solidFill>
                       <a:prstDash val="solid"/>
                     </a:lnT>
                     <a:lnB w="9525" cap="flat" cmpd="sng" algn="ctr">
                       <a:solidFill>
-                        <a:srgbClr val="DCEED3"/>
+                        <a:srgbClr val="D1FAEA"/>
                       </a:solidFill>
                       <a:prstDash val="solid"/>
                     </a:lnB>
                     <a:solidFill>
-                      <a:srgbClr val="DCEED3"/>
+                      <a:srgbClr val="D1FAEA"/>
                     </a:solidFill>
                   </a:tcPr>
                 </a:tc>
@@ -7815,25 +7815,25 @@
                   <a:tcPr anchor="ctr" marL="73152" marR="73152">
                     <a:lnL w="9525" cap="flat" cmpd="sng" algn="ctr">
                       <a:solidFill>
-                        <a:srgbClr val="DCEED3"/>
+                        <a:srgbClr val="D1FAEA"/>
                       </a:solidFill>
                       <a:prstDash val="solid"/>
                     </a:lnL>
                     <a:lnR w="9525" cap="flat" cmpd="sng" algn="ctr">
                       <a:solidFill>
-                        <a:srgbClr val="DCEED3"/>
+                        <a:srgbClr val="D1FAEA"/>
                       </a:solidFill>
                       <a:prstDash val="solid"/>
                     </a:lnR>
                     <a:lnT w="9525" cap="flat" cmpd="sng" algn="ctr">
                       <a:solidFill>
-                        <a:srgbClr val="DCEED3"/>
+                        <a:srgbClr val="D1FAEA"/>
                       </a:solidFill>
                       <a:prstDash val="solid"/>
                     </a:lnT>
                     <a:lnB w="9525" cap="flat" cmpd="sng" algn="ctr">
                       <a:solidFill>
-                        <a:srgbClr val="DCEED3"/>
+                        <a:srgbClr val="D1FAEA"/>
                       </a:solidFill>
                       <a:prstDash val="solid"/>
                     </a:lnB>
@@ -7861,25 +7861,25 @@
                   <a:tcPr anchor="ctr" marL="73152" marR="73152">
                     <a:lnL w="9525" cap="flat" cmpd="sng" algn="ctr">
                       <a:solidFill>
-                        <a:srgbClr val="DCEED3"/>
+                        <a:srgbClr val="D1FAEA"/>
                       </a:solidFill>
                       <a:prstDash val="solid"/>
                     </a:lnL>
                     <a:lnR w="9525" cap="flat" cmpd="sng" algn="ctr">
                       <a:solidFill>
-                        <a:srgbClr val="DCEED3"/>
+                        <a:srgbClr val="D1FAEA"/>
                       </a:solidFill>
                       <a:prstDash val="solid"/>
                     </a:lnR>
                     <a:lnT w="9525" cap="flat" cmpd="sng" algn="ctr">
                       <a:solidFill>
-                        <a:srgbClr val="DCEED3"/>
+                        <a:srgbClr val="D1FAEA"/>
                       </a:solidFill>
                       <a:prstDash val="solid"/>
                     </a:lnT>
                     <a:lnB w="9525" cap="flat" cmpd="sng" algn="ctr">
                       <a:solidFill>
-                        <a:srgbClr val="DCEED3"/>
+                        <a:srgbClr val="D1FAEA"/>
                       </a:solidFill>
                       <a:prstDash val="solid"/>
                     </a:lnB>
@@ -7907,25 +7907,25 @@
                   <a:tcPr anchor="ctr" marL="73152" marR="73152">
                     <a:lnL w="9525" cap="flat" cmpd="sng" algn="ctr">
                       <a:solidFill>
-                        <a:srgbClr val="DCEED3"/>
+                        <a:srgbClr val="D1FAEA"/>
                       </a:solidFill>
                       <a:prstDash val="solid"/>
                     </a:lnL>
                     <a:lnR w="9525" cap="flat" cmpd="sng" algn="ctr">
                       <a:solidFill>
-                        <a:srgbClr val="DCEED3"/>
+                        <a:srgbClr val="D1FAEA"/>
                       </a:solidFill>
                       <a:prstDash val="solid"/>
                     </a:lnR>
                     <a:lnT w="9525" cap="flat" cmpd="sng" algn="ctr">
                       <a:solidFill>
-                        <a:srgbClr val="DCEED3"/>
+                        <a:srgbClr val="D1FAEA"/>
                       </a:solidFill>
                       <a:prstDash val="solid"/>
                     </a:lnT>
                     <a:lnB w="9525" cap="flat" cmpd="sng" algn="ctr">
                       <a:solidFill>
-                        <a:srgbClr val="DCEED3"/>
+                        <a:srgbClr val="D1FAEA"/>
                       </a:solidFill>
                       <a:prstDash val="solid"/>
                     </a:lnB>
@@ -7945,7 +7945,7 @@
                       <a:r>
                         <a:rPr sz="1400" b="1">
                           <a:solidFill>
-                            <a:srgbClr val="314F22"/>
+                            <a:srgbClr val="115F41"/>
                           </a:solidFill>
                         </a:rPr>
                         <a:t>연금·노후자금</a:t>
@@ -7955,30 +7955,30 @@
                   <a:tcPr anchor="ctr" marL="73152" marR="73152">
                     <a:lnL w="9525" cap="flat" cmpd="sng" algn="ctr">
                       <a:solidFill>
-                        <a:srgbClr val="DCEED3"/>
+                        <a:srgbClr val="D1FAEA"/>
                       </a:solidFill>
                       <a:prstDash val="solid"/>
                     </a:lnL>
                     <a:lnR w="9525" cap="flat" cmpd="sng" algn="ctr">
                       <a:solidFill>
-                        <a:srgbClr val="DCEED3"/>
+                        <a:srgbClr val="D1FAEA"/>
                       </a:solidFill>
                       <a:prstDash val="solid"/>
                     </a:lnR>
                     <a:lnT w="9525" cap="flat" cmpd="sng" algn="ctr">
                       <a:solidFill>
-                        <a:srgbClr val="DCEED3"/>
+                        <a:srgbClr val="D1FAEA"/>
                       </a:solidFill>
                       <a:prstDash val="solid"/>
                     </a:lnT>
                     <a:lnB w="9525" cap="flat" cmpd="sng" algn="ctr">
                       <a:solidFill>
-                        <a:srgbClr val="DCEED3"/>
+                        <a:srgbClr val="D1FAEA"/>
                       </a:solidFill>
                       <a:prstDash val="solid"/>
                     </a:lnB>
                     <a:solidFill>
-                      <a:srgbClr val="DCEED3"/>
+                      <a:srgbClr val="D1FAEA"/>
                     </a:solidFill>
                   </a:tcPr>
                 </a:tc>
@@ -8001,30 +8001,30 @@
                   <a:tcPr anchor="ctr" marL="73152" marR="73152">
                     <a:lnL w="9525" cap="flat" cmpd="sng" algn="ctr">
                       <a:solidFill>
-                        <a:srgbClr val="DCEED3"/>
+                        <a:srgbClr val="D1FAEA"/>
                       </a:solidFill>
                       <a:prstDash val="solid"/>
                     </a:lnL>
                     <a:lnR w="9525" cap="flat" cmpd="sng" algn="ctr">
                       <a:solidFill>
-                        <a:srgbClr val="DCEED3"/>
+                        <a:srgbClr val="D1FAEA"/>
                       </a:solidFill>
                       <a:prstDash val="solid"/>
                     </a:lnR>
                     <a:lnT w="9525" cap="flat" cmpd="sng" algn="ctr">
                       <a:solidFill>
-                        <a:srgbClr val="DCEED3"/>
+                        <a:srgbClr val="D1FAEA"/>
                       </a:solidFill>
                       <a:prstDash val="solid"/>
                     </a:lnT>
                     <a:lnB w="9525" cap="flat" cmpd="sng" algn="ctr">
                       <a:solidFill>
-                        <a:srgbClr val="DCEED3"/>
+                        <a:srgbClr val="D1FAEA"/>
                       </a:solidFill>
                       <a:prstDash val="solid"/>
                     </a:lnB>
                     <a:solidFill>
-                      <a:srgbClr val="F3F9F1"/>
+                      <a:srgbClr val="EEFCF6"/>
                     </a:solidFill>
                   </a:tcPr>
                 </a:tc>
@@ -8047,30 +8047,30 @@
                   <a:tcPr anchor="ctr" marL="73152" marR="73152">
                     <a:lnL w="9525" cap="flat" cmpd="sng" algn="ctr">
                       <a:solidFill>
-                        <a:srgbClr val="DCEED3"/>
+                        <a:srgbClr val="D1FAEA"/>
                       </a:solidFill>
                       <a:prstDash val="solid"/>
                     </a:lnL>
                     <a:lnR w="9525" cap="flat" cmpd="sng" algn="ctr">
                       <a:solidFill>
-                        <a:srgbClr val="DCEED3"/>
+                        <a:srgbClr val="D1FAEA"/>
                       </a:solidFill>
                       <a:prstDash val="solid"/>
                     </a:lnR>
                     <a:lnT w="9525" cap="flat" cmpd="sng" algn="ctr">
                       <a:solidFill>
-                        <a:srgbClr val="DCEED3"/>
+                        <a:srgbClr val="D1FAEA"/>
                       </a:solidFill>
                       <a:prstDash val="solid"/>
                     </a:lnT>
                     <a:lnB w="9525" cap="flat" cmpd="sng" algn="ctr">
                       <a:solidFill>
-                        <a:srgbClr val="DCEED3"/>
+                        <a:srgbClr val="D1FAEA"/>
                       </a:solidFill>
                       <a:prstDash val="solid"/>
                     </a:lnB>
                     <a:solidFill>
-                      <a:srgbClr val="F3F9F1"/>
+                      <a:srgbClr val="EEFCF6"/>
                     </a:solidFill>
                   </a:tcPr>
                 </a:tc>
@@ -8093,30 +8093,30 @@
                   <a:tcPr anchor="ctr" marL="73152" marR="73152">
                     <a:lnL w="9525" cap="flat" cmpd="sng" algn="ctr">
                       <a:solidFill>
-                        <a:srgbClr val="DCEED3"/>
+                        <a:srgbClr val="D1FAEA"/>
                       </a:solidFill>
                       <a:prstDash val="solid"/>
                     </a:lnL>
                     <a:lnR w="9525" cap="flat" cmpd="sng" algn="ctr">
                       <a:solidFill>
-                        <a:srgbClr val="DCEED3"/>
+                        <a:srgbClr val="D1FAEA"/>
                       </a:solidFill>
                       <a:prstDash val="solid"/>
                     </a:lnR>
                     <a:lnT w="9525" cap="flat" cmpd="sng" algn="ctr">
                       <a:solidFill>
-                        <a:srgbClr val="DCEED3"/>
+                        <a:srgbClr val="D1FAEA"/>
                       </a:solidFill>
                       <a:prstDash val="solid"/>
                     </a:lnT>
                     <a:lnB w="9525" cap="flat" cmpd="sng" algn="ctr">
                       <a:solidFill>
-                        <a:srgbClr val="DCEED3"/>
+                        <a:srgbClr val="D1FAEA"/>
                       </a:solidFill>
                       <a:prstDash val="solid"/>
                     </a:lnB>
                     <a:solidFill>
-                      <a:srgbClr val="F3F9F1"/>
+                      <a:srgbClr val="EEFCF6"/>
                     </a:solidFill>
                   </a:tcPr>
                 </a:tc>
@@ -8139,7 +8139,7 @@
     <p:bg>
       <p:bgPr>
         <a:solidFill>
-          <a:srgbClr val="F3F9F1"/>
+          <a:srgbClr val="EEFCF6"/>
         </a:solidFill>
         <a:effectLst/>
       </p:bgPr>
@@ -8166,7 +8166,7 @@
             <a:avLst/>
           </a:prstGeom>
           <a:solidFill>
-            <a:srgbClr val="5D9640"/>
+            <a:srgbClr val="26C588"/>
           </a:solidFill>
           <a:ln>
             <a:noFill/>
@@ -8195,7 +8195,7 @@
             <a:avLst/>
           </a:prstGeom>
           <a:solidFill>
-            <a:srgbClr val="4B3D8F"/>
+            <a:srgbClr val="209DB6"/>
           </a:solidFill>
           <a:ln>
             <a:noFill/>
@@ -8239,7 +8239,7 @@
             <a:r>
               <a:rPr sz="3000" b="1" i="0">
                 <a:solidFill>
-                  <a:srgbClr val="314F22"/>
+                  <a:srgbClr val="115F41"/>
                 </a:solidFill>
               </a:rPr>
               <a:t>월 보험료 한눈에</a:t>
@@ -8264,11 +8264,11 @@
             </a:avLst>
           </a:prstGeom>
           <a:solidFill>
-            <a:srgbClr val="F3F9F1"/>
+            <a:srgbClr val="EEFCF6"/>
           </a:solidFill>
           <a:ln w="15875">
             <a:solidFill>
-              <a:srgbClr val="DCEED3"/>
+              <a:srgbClr val="D1FAEA"/>
             </a:solidFill>
           </a:ln>
         </p:spPr>
@@ -8295,7 +8295,7 @@
             <a:avLst/>
           </a:prstGeom>
           <a:solidFill>
-            <a:srgbClr val="5D9640"/>
+            <a:srgbClr val="26C588"/>
           </a:solidFill>
           <a:ln>
             <a:noFill/>
@@ -8353,7 +8353,7 @@
             <a:r>
               <a:rPr sz="1700" b="1" i="0">
                 <a:solidFill>
-                  <a:srgbClr val="314F22"/>
+                  <a:srgbClr val="115F41"/>
                 </a:solidFill>
               </a:rPr>
               <a:t>월 보험료 합계</a:t>
@@ -8416,11 +8416,11 @@
             </a:avLst>
           </a:prstGeom>
           <a:solidFill>
-            <a:srgbClr val="F3F9F1"/>
+            <a:srgbClr val="EEFCF6"/>
           </a:solidFill>
           <a:ln w="15875">
             <a:solidFill>
-              <a:srgbClr val="DCEED3"/>
+              <a:srgbClr val="D1FAEA"/>
             </a:solidFill>
           </a:ln>
         </p:spPr>
@@ -8447,7 +8447,7 @@
             <a:avLst/>
           </a:prstGeom>
           <a:solidFill>
-            <a:srgbClr val="5D9640"/>
+            <a:srgbClr val="26C588"/>
           </a:solidFill>
           <a:ln>
             <a:noFill/>
@@ -8505,7 +8505,7 @@
             <a:r>
               <a:rPr sz="1700" b="1" i="0">
                 <a:solidFill>
-                  <a:srgbClr val="314F22"/>
+                  <a:srgbClr val="115F41"/>
                 </a:solidFill>
               </a:rPr>
               <a:t>연 보험료 합계</a:t>
@@ -8568,11 +8568,11 @@
             </a:avLst>
           </a:prstGeom>
           <a:solidFill>
-            <a:srgbClr val="F3F9F1"/>
+            <a:srgbClr val="EEFCF6"/>
           </a:solidFill>
           <a:ln w="15875">
             <a:solidFill>
-              <a:srgbClr val="DCEED3"/>
+              <a:srgbClr val="D1FAEA"/>
             </a:solidFill>
           </a:ln>
         </p:spPr>
@@ -8599,7 +8599,7 @@
             <a:avLst/>
           </a:prstGeom>
           <a:solidFill>
-            <a:srgbClr val="5D9640"/>
+            <a:srgbClr val="26C588"/>
           </a:solidFill>
           <a:ln>
             <a:noFill/>
@@ -8657,7 +8657,7 @@
             <a:r>
               <a:rPr sz="1700" b="1" i="0">
                 <a:solidFill>
-                  <a:srgbClr val="314F22"/>
+                  <a:srgbClr val="115F41"/>
                 </a:solidFill>
               </a:rPr>
               <a:t>월 소득 대비</a:t>
@@ -8755,7 +8755,7 @@
     <p:bg>
       <p:bgPr>
         <a:solidFill>
-          <a:srgbClr val="F3F9F1"/>
+          <a:srgbClr val="EEFCF6"/>
         </a:solidFill>
         <a:effectLst/>
       </p:bgPr>
@@ -8782,7 +8782,7 @@
             <a:avLst/>
           </a:prstGeom>
           <a:solidFill>
-            <a:srgbClr val="5D9640"/>
+            <a:srgbClr val="26C588"/>
           </a:solidFill>
           <a:ln>
             <a:noFill/>
@@ -8811,7 +8811,7 @@
             <a:avLst/>
           </a:prstGeom>
           <a:solidFill>
-            <a:srgbClr val="4B3D8F"/>
+            <a:srgbClr val="209DB6"/>
           </a:solidFill>
           <a:ln>
             <a:noFill/>
@@ -8855,7 +8855,7 @@
             <a:r>
               <a:rPr sz="3000" b="1" i="0">
                 <a:solidFill>
-                  <a:srgbClr val="314F22"/>
+                  <a:srgbClr val="115F41"/>
                 </a:solidFill>
               </a:rPr>
               <a:t>점검 메모와 다음 할 일</a:t>
@@ -8880,11 +8880,11 @@
             </a:avLst>
           </a:prstGeom>
           <a:solidFill>
-            <a:srgbClr val="F3F9F1"/>
+            <a:srgbClr val="EEFCF6"/>
           </a:solidFill>
           <a:ln w="15875">
             <a:solidFill>
-              <a:srgbClr val="DCEED3"/>
+              <a:srgbClr val="D1FAEA"/>
             </a:solidFill>
           </a:ln>
         </p:spPr>
@@ -8911,7 +8911,7 @@
             <a:avLst/>
           </a:prstGeom>
           <a:solidFill>
-            <a:srgbClr val="5D9640"/>
+            <a:srgbClr val="26C588"/>
           </a:solidFill>
           <a:ln>
             <a:noFill/>
@@ -8969,7 +8969,7 @@
             <a:r>
               <a:rPr sz="1800" b="1" i="0">
                 <a:solidFill>
-                  <a:srgbClr val="314F22"/>
+                  <a:srgbClr val="115F41"/>
                 </a:solidFill>
               </a:rPr>
               <a:t>확인할 것</a:t>
@@ -9032,11 +9032,11 @@
             </a:avLst>
           </a:prstGeom>
           <a:solidFill>
-            <a:srgbClr val="F3F9F1"/>
+            <a:srgbClr val="EEFCF6"/>
           </a:solidFill>
           <a:ln w="15875">
             <a:solidFill>
-              <a:srgbClr val="DCEED3"/>
+              <a:srgbClr val="D1FAEA"/>
             </a:solidFill>
           </a:ln>
         </p:spPr>
@@ -9063,7 +9063,7 @@
             <a:avLst/>
           </a:prstGeom>
           <a:solidFill>
-            <a:srgbClr val="5D9640"/>
+            <a:srgbClr val="26C588"/>
           </a:solidFill>
           <a:ln>
             <a:noFill/>
@@ -9121,7 +9121,7 @@
             <a:r>
               <a:rPr sz="1800" b="1" i="0">
                 <a:solidFill>
-                  <a:srgbClr val="314F22"/>
+                  <a:srgbClr val="115F41"/>
                 </a:solidFill>
               </a:rPr>
               <a:t>문의할 것</a:t>
@@ -9184,11 +9184,11 @@
             </a:avLst>
           </a:prstGeom>
           <a:solidFill>
-            <a:srgbClr val="F3F9F1"/>
+            <a:srgbClr val="EEFCF6"/>
           </a:solidFill>
           <a:ln w="15875">
             <a:solidFill>
-              <a:srgbClr val="DCEED3"/>
+              <a:srgbClr val="D1FAEA"/>
             </a:solidFill>
           </a:ln>
         </p:spPr>
@@ -9215,7 +9215,7 @@
             <a:avLst/>
           </a:prstGeom>
           <a:solidFill>
-            <a:srgbClr val="5D9640"/>
+            <a:srgbClr val="26C588"/>
           </a:solidFill>
           <a:ln>
             <a:noFill/>
@@ -9273,7 +9273,7 @@
             <a:r>
               <a:rPr sz="1800" b="1" i="0">
                 <a:solidFill>
-                  <a:srgbClr val="314F22"/>
+                  <a:srgbClr val="115F41"/>
                 </a:solidFill>
               </a:rPr>
               <a:t>정리할 날짜</a:t>
@@ -9376,34 +9376,34 @@
         <a:sysClr val="window" lastClr="FFFFFF"/>
       </a:lt1>
       <a:dk2>
-        <a:srgbClr val="314F22"/>
+        <a:srgbClr val="115F41"/>
       </a:dk2>
       <a:lt2>
-        <a:srgbClr val="F3F9F1"/>
+        <a:srgbClr val="EEFCF6"/>
       </a:lt2>
       <a:accent1>
-        <a:srgbClr val="5D9640"/>
+        <a:srgbClr val="26C588"/>
       </a:accent1>
       <a:accent2>
-        <a:srgbClr val="4B3D8F"/>
+        <a:srgbClr val="209DB6"/>
       </a:accent2>
       <a:accent3>
-        <a:srgbClr val="314F22"/>
+        <a:srgbClr val="115F41"/>
       </a:accent3>
       <a:accent4>
-        <a:srgbClr val="DCEED3"/>
+        <a:srgbClr val="D1FAEA"/>
       </a:accent4>
       <a:accent5>
-        <a:srgbClr val="546A68"/>
+        <a:srgbClr val="23B19F"/>
       </a:accent5>
       <a:accent6>
-        <a:srgbClr val="83957A"/>
+        <a:srgbClr val="709F8D"/>
       </a:accent6>
       <a:hlink>
-        <a:srgbClr val="5D9640"/>
+        <a:srgbClr val="26C588"/>
       </a:hlink>
       <a:folHlink>
-        <a:srgbClr val="314F22"/>
+        <a:srgbClr val="115F41"/>
       </a:folHlink>
     </a:clrScheme>
     <a:fontScheme name="Office">
